--- a/presentation/Suppliers_presentation.pptx
+++ b/presentation/Suppliers_presentation.pptx
@@ -5287,7 +5287,7 @@
             <a:avLst/>
           </a:prstGeom>
           <a:solidFill>
-            <a:srgbClr val="B23924"/>
+            <a:srgbClr val="C72A1C"/>
           </a:solidFill>
           <a:ln>
             <a:noFill/>
@@ -5342,7 +5342,7 @@
             <a:r>
               <a:rPr sz="1050" b="1" spc="70">
                 <a:solidFill>
-                  <a:srgbClr val="B23924"/>
+                  <a:srgbClr val="C72A1C"/>
                 </a:solidFill>
                 <a:latin typeface="Calibri"/>
               </a:rPr>
@@ -5359,8 +5359,8 @@
         </p:nvSpPr>
         <p:spPr>
           <a:xfrm>
-            <a:off x="502920" y="548640"/>
-            <a:ext cx="6949440" cy="502920"/>
+            <a:off x="502920" y="530352"/>
+            <a:ext cx="6949440" cy="548640"/>
           </a:xfrm>
           <a:prstGeom prst="rect">
             <a:avLst/>
@@ -5375,11 +5375,11 @@
           <a:p>
             <a:pPr algn="l"/>
             <a:r>
-              <a:rPr sz="3000" b="1">
-                <a:solidFill>
-                  <a:srgbClr val="231C18"/>
-                </a:solidFill>
-                <a:latin typeface="Calibri"/>
+              <a:rPr sz="3200" b="1">
+                <a:solidFill>
+                  <a:srgbClr val="18120E"/>
+                </a:solidFill>
+                <a:latin typeface="Cambria"/>
               </a:rPr>
               <a:t>Furikake 50 г — собівартість</a:t>
             </a:r>
@@ -5403,7 +5403,7 @@
             </a:avLst>
           </a:prstGeom>
           <a:solidFill>
-            <a:srgbClr val="B23924"/>
+            <a:srgbClr val="C72A1C"/>
           </a:solidFill>
           <a:ln>
             <a:noFill/>
@@ -5482,7 +5482,7 @@
             <a:avLst/>
           </a:prstGeom>
           <a:solidFill>
-            <a:srgbClr val="B23924"/>
+            <a:srgbClr val="C72A1C"/>
           </a:solidFill>
           <a:ln>
             <a:noFill/>
@@ -5537,7 +5537,51 @@
       </p:pic>
       <p:sp>
         <p:nvSpPr>
-          <p:cNvPr id="10" name="Oval 9"/>
+          <p:cNvPr id="10" name="Rectangle 9"/>
+          <p:cNvSpPr/>
+          <p:nvPr/>
+        </p:nvSpPr>
+        <p:spPr>
+          <a:xfrm>
+            <a:off x="594360" y="1298448"/>
+            <a:ext cx="2462022" cy="1554480"/>
+          </a:xfrm>
+          <a:prstGeom prst="rect">
+            <a:avLst/>
+          </a:prstGeom>
+          <a:noFill/>
+          <a:ln w="12700">
+            <a:solidFill>
+              <a:srgbClr val="C9A15A"/>
+            </a:solidFill>
+          </a:ln>
+          <a:effectLst/>
+        </p:spPr>
+        <p:style>
+          <a:lnRef idx="1">
+            <a:schemeClr val="accent1"/>
+          </a:lnRef>
+          <a:fillRef idx="3">
+            <a:schemeClr val="accent1"/>
+          </a:fillRef>
+          <a:effectRef idx="2">
+            <a:schemeClr val="accent1"/>
+          </a:effectRef>
+          <a:fontRef idx="minor">
+            <a:schemeClr val="lt1"/>
+          </a:fontRef>
+        </p:style>
+        <p:txBody>
+          <a:bodyPr rtlCol="0" anchor="ctr"/>
+          <a:lstStyle/>
+          <a:p>
+            <a:pPr algn="ctr"/>
+          </a:p>
+        </p:txBody>
+      </p:sp>
+      <p:sp>
+        <p:nvSpPr>
+          <p:cNvPr id="11" name="Oval 10"/>
           <p:cNvSpPr/>
           <p:nvPr/>
         </p:nvSpPr>
@@ -5550,7 +5594,7 @@
             <a:avLst/>
           </a:prstGeom>
           <a:solidFill>
-            <a:srgbClr val="B23924"/>
+            <a:srgbClr val="C72A1C"/>
           </a:solidFill>
           <a:ln>
             <a:noFill/>
@@ -5581,7 +5625,7 @@
       </p:sp>
       <p:sp>
         <p:nvSpPr>
-          <p:cNvPr id="11" name="TextBox 10"/>
+          <p:cNvPr id="12" name="TextBox 11"/>
           <p:cNvSpPr txBox="1"/>
           <p:nvPr/>
         </p:nvSpPr>
@@ -5605,7 +5649,7 @@
             <a:r>
               <a:rPr sz="730" b="1" spc="70">
                 <a:solidFill>
-                  <a:srgbClr val="231C18"/>
+                  <a:srgbClr val="18120E"/>
                 </a:solidFill>
                 <a:latin typeface="Calibri"/>
               </a:rPr>
@@ -5616,7 +5660,7 @@
       </p:sp>
       <p:sp>
         <p:nvSpPr>
-          <p:cNvPr id="12" name="TextBox 11"/>
+          <p:cNvPr id="13" name="TextBox 12"/>
           <p:cNvSpPr txBox="1"/>
           <p:nvPr/>
         </p:nvSpPr>
@@ -5644,7 +5688,7 @@
             <a:r>
               <a:rPr sz="1400" b="1">
                 <a:solidFill>
-                  <a:srgbClr val="231C18"/>
+                  <a:srgbClr val="18120E"/>
                 </a:solidFill>
                 <a:latin typeface="Calibri"/>
               </a:rPr>
@@ -5655,7 +5699,7 @@
       </p:sp>
       <p:sp>
         <p:nvSpPr>
-          <p:cNvPr id="13" name="TextBox 12"/>
+          <p:cNvPr id="14" name="TextBox 13"/>
           <p:cNvSpPr txBox="1"/>
           <p:nvPr/>
         </p:nvSpPr>
@@ -5683,7 +5727,7 @@
             <a:r>
               <a:rPr sz="830" b="0">
                 <a:solidFill>
-                  <a:srgbClr val="6E6760"/>
+                  <a:srgbClr val="6A5F56"/>
                 </a:solidFill>
                 <a:latin typeface="Calibri"/>
               </a:rPr>
@@ -5694,7 +5738,7 @@
       </p:sp>
       <p:sp>
         <p:nvSpPr>
-          <p:cNvPr id="14" name="Rounded Rectangle 13"/>
+          <p:cNvPr id="15" name="Rounded Rectangle 14"/>
           <p:cNvSpPr/>
           <p:nvPr/>
         </p:nvSpPr>
@@ -5709,7 +5753,7 @@
             </a:avLst>
           </a:prstGeom>
           <a:solidFill>
-            <a:srgbClr val="231C18"/>
+            <a:srgbClr val="18120E"/>
           </a:solidFill>
           <a:ln>
             <a:noFill/>
@@ -5740,7 +5784,7 @@
       </p:sp>
       <p:sp>
         <p:nvSpPr>
-          <p:cNvPr id="15" name="TextBox 14"/>
+          <p:cNvPr id="16" name="TextBox 15"/>
           <p:cNvSpPr txBox="1"/>
           <p:nvPr/>
         </p:nvSpPr>
@@ -5764,7 +5808,7 @@
             <a:r>
               <a:rPr sz="630" b="1" spc="60">
                 <a:solidFill>
-                  <a:srgbClr val="E8A98D"/>
+                  <a:srgbClr val="C9A15A"/>
                 </a:solidFill>
                 <a:latin typeface="Calibri"/>
               </a:rPr>
@@ -5775,7 +5819,7 @@
       </p:sp>
       <p:sp>
         <p:nvSpPr>
-          <p:cNvPr id="16" name="TextBox 15"/>
+          <p:cNvPr id="17" name="TextBox 16"/>
           <p:cNvSpPr txBox="1"/>
           <p:nvPr/>
         </p:nvSpPr>
@@ -5810,7 +5854,7 @@
       </p:sp>
       <p:sp>
         <p:nvSpPr>
-          <p:cNvPr id="17" name="TextBox 16"/>
+          <p:cNvPr id="18" name="TextBox 17"/>
           <p:cNvSpPr txBox="1"/>
           <p:nvPr/>
         </p:nvSpPr>
@@ -5845,7 +5889,7 @@
       </p:sp>
       <p:sp>
         <p:nvSpPr>
-          <p:cNvPr id="18" name="Rectangle 17"/>
+          <p:cNvPr id="19" name="Rectangle 18"/>
           <p:cNvSpPr/>
           <p:nvPr/>
         </p:nvSpPr>
@@ -5889,7 +5933,7 @@
       </p:sp>
       <p:sp>
         <p:nvSpPr>
-          <p:cNvPr id="19" name="TextBox 18"/>
+          <p:cNvPr id="20" name="TextBox 19"/>
           <p:cNvSpPr txBox="1"/>
           <p:nvPr/>
         </p:nvSpPr>
@@ -5913,7 +5957,7 @@
             <a:r>
               <a:rPr sz="730" b="0">
                 <a:solidFill>
-                  <a:srgbClr val="6E6760"/>
+                  <a:srgbClr val="6A5F56"/>
                 </a:solidFill>
                 <a:latin typeface="Calibri"/>
               </a:rPr>
@@ -5924,7 +5968,7 @@
       </p:sp>
       <p:sp>
         <p:nvSpPr>
-          <p:cNvPr id="20" name="TextBox 19"/>
+          <p:cNvPr id="21" name="TextBox 20"/>
           <p:cNvSpPr txBox="1"/>
           <p:nvPr/>
         </p:nvSpPr>
@@ -5948,7 +5992,7 @@
             <a:r>
               <a:rPr sz="930" b="1">
                 <a:solidFill>
-                  <a:srgbClr val="231C18"/>
+                  <a:srgbClr val="18120E"/>
                 </a:solidFill>
                 <a:latin typeface="Calibri"/>
               </a:rPr>
@@ -5959,7 +6003,7 @@
       </p:sp>
       <p:sp>
         <p:nvSpPr>
-          <p:cNvPr id="21" name="Rectangle 20"/>
+          <p:cNvPr id="22" name="Rectangle 21"/>
           <p:cNvSpPr/>
           <p:nvPr/>
         </p:nvSpPr>
@@ -6003,7 +6047,7 @@
       </p:sp>
       <p:sp>
         <p:nvSpPr>
-          <p:cNvPr id="22" name="TextBox 21"/>
+          <p:cNvPr id="23" name="TextBox 22"/>
           <p:cNvSpPr txBox="1"/>
           <p:nvPr/>
         </p:nvSpPr>
@@ -6027,7 +6071,7 @@
             <a:r>
               <a:rPr sz="730" b="0">
                 <a:solidFill>
-                  <a:srgbClr val="6E6760"/>
+                  <a:srgbClr val="6A5F56"/>
                 </a:solidFill>
                 <a:latin typeface="Calibri"/>
               </a:rPr>
@@ -6038,7 +6082,7 @@
       </p:sp>
       <p:sp>
         <p:nvSpPr>
-          <p:cNvPr id="23" name="TextBox 22"/>
+          <p:cNvPr id="24" name="TextBox 23"/>
           <p:cNvSpPr txBox="1"/>
           <p:nvPr/>
         </p:nvSpPr>
@@ -6062,7 +6106,7 @@
             <a:r>
               <a:rPr sz="930" b="1">
                 <a:solidFill>
-                  <a:srgbClr val="231C18"/>
+                  <a:srgbClr val="18120E"/>
                 </a:solidFill>
                 <a:latin typeface="Calibri"/>
               </a:rPr>
@@ -6073,7 +6117,7 @@
       </p:sp>
       <p:sp>
         <p:nvSpPr>
-          <p:cNvPr id="24" name="Rectangle 23"/>
+          <p:cNvPr id="25" name="Rectangle 24"/>
           <p:cNvSpPr/>
           <p:nvPr/>
         </p:nvSpPr>
@@ -6086,7 +6130,7 @@
             <a:avLst/>
           </a:prstGeom>
           <a:solidFill>
-            <a:srgbClr val="B23924"/>
+            <a:srgbClr val="C72A1C"/>
           </a:solidFill>
           <a:ln>
             <a:noFill/>
@@ -6117,7 +6161,7 @@
       </p:sp>
       <p:pic>
         <p:nvPicPr>
-          <p:cNvPr id="25" name="Picture 24" descr="sku_ms_wasabi.png"/>
+          <p:cNvPr id="26" name="Picture 25" descr="sku_ms_wasabi.png"/>
           <p:cNvPicPr>
             <a:picLocks noChangeAspect="1"/>
           </p:cNvPicPr>
@@ -6141,7 +6185,51 @@
       </p:pic>
       <p:sp>
         <p:nvSpPr>
-          <p:cNvPr id="26" name="Rectangle 25"/>
+          <p:cNvPr id="27" name="Rectangle 26"/>
+          <p:cNvSpPr/>
+          <p:nvPr/>
+        </p:nvSpPr>
+        <p:spPr>
+          <a:xfrm>
+            <a:off x="3440430" y="1298448"/>
+            <a:ext cx="2462022" cy="1554480"/>
+          </a:xfrm>
+          <a:prstGeom prst="rect">
+            <a:avLst/>
+          </a:prstGeom>
+          <a:noFill/>
+          <a:ln w="12700">
+            <a:solidFill>
+              <a:srgbClr val="C9A15A"/>
+            </a:solidFill>
+          </a:ln>
+          <a:effectLst/>
+        </p:spPr>
+        <p:style>
+          <a:lnRef idx="1">
+            <a:schemeClr val="accent1"/>
+          </a:lnRef>
+          <a:fillRef idx="3">
+            <a:schemeClr val="accent1"/>
+          </a:fillRef>
+          <a:effectRef idx="2">
+            <a:schemeClr val="accent1"/>
+          </a:effectRef>
+          <a:fontRef idx="minor">
+            <a:schemeClr val="lt1"/>
+          </a:fontRef>
+        </p:style>
+        <p:txBody>
+          <a:bodyPr rtlCol="0" anchor="ctr"/>
+          <a:lstStyle/>
+          <a:p>
+            <a:pPr algn="ctr"/>
+          </a:p>
+        </p:txBody>
+      </p:sp>
+      <p:sp>
+        <p:nvSpPr>
+          <p:cNvPr id="28" name="Rectangle 27"/>
           <p:cNvSpPr/>
           <p:nvPr/>
         </p:nvSpPr>
@@ -6154,7 +6242,7 @@
             <a:avLst/>
           </a:prstGeom>
           <a:solidFill>
-            <a:srgbClr val="8F2A19"/>
+            <a:srgbClr val="8A1C12"/>
           </a:solidFill>
           <a:ln>
             <a:noFill/>
@@ -6185,7 +6273,7 @@
       </p:sp>
       <p:sp>
         <p:nvSpPr>
-          <p:cNvPr id="27" name="TextBox 26"/>
+          <p:cNvPr id="29" name="TextBox 28"/>
           <p:cNvSpPr txBox="1"/>
           <p:nvPr/>
         </p:nvSpPr>
@@ -6220,7 +6308,7 @@
       </p:sp>
       <p:sp>
         <p:nvSpPr>
-          <p:cNvPr id="28" name="Oval 27"/>
+          <p:cNvPr id="30" name="Oval 29"/>
           <p:cNvSpPr/>
           <p:nvPr/>
         </p:nvSpPr>
@@ -6233,7 +6321,7 @@
             <a:avLst/>
           </a:prstGeom>
           <a:solidFill>
-            <a:srgbClr val="B23924"/>
+            <a:srgbClr val="C72A1C"/>
           </a:solidFill>
           <a:ln>
             <a:noFill/>
@@ -6264,7 +6352,7 @@
       </p:sp>
       <p:sp>
         <p:nvSpPr>
-          <p:cNvPr id="29" name="TextBox 28"/>
+          <p:cNvPr id="31" name="TextBox 30"/>
           <p:cNvSpPr txBox="1"/>
           <p:nvPr/>
         </p:nvSpPr>
@@ -6288,7 +6376,7 @@
             <a:r>
               <a:rPr sz="730" b="1" spc="70">
                 <a:solidFill>
-                  <a:srgbClr val="231C18"/>
+                  <a:srgbClr val="18120E"/>
                 </a:solidFill>
                 <a:latin typeface="Calibri"/>
               </a:rPr>
@@ -6299,7 +6387,7 @@
       </p:sp>
       <p:sp>
         <p:nvSpPr>
-          <p:cNvPr id="30" name="TextBox 29"/>
+          <p:cNvPr id="32" name="TextBox 31"/>
           <p:cNvSpPr txBox="1"/>
           <p:nvPr/>
         </p:nvSpPr>
@@ -6327,7 +6415,7 @@
             <a:r>
               <a:rPr sz="1400" b="1">
                 <a:solidFill>
-                  <a:srgbClr val="231C18"/>
+                  <a:srgbClr val="18120E"/>
                 </a:solidFill>
                 <a:latin typeface="Calibri"/>
               </a:rPr>
@@ -6338,7 +6426,7 @@
       </p:sp>
       <p:sp>
         <p:nvSpPr>
-          <p:cNvPr id="31" name="TextBox 30"/>
+          <p:cNvPr id="33" name="TextBox 32"/>
           <p:cNvSpPr txBox="1"/>
           <p:nvPr/>
         </p:nvSpPr>
@@ -6366,7 +6454,7 @@
             <a:r>
               <a:rPr sz="830" b="0">
                 <a:solidFill>
-                  <a:srgbClr val="6E6760"/>
+                  <a:srgbClr val="6A5F56"/>
                 </a:solidFill>
                 <a:latin typeface="Calibri"/>
               </a:rPr>
@@ -6377,7 +6465,7 @@
       </p:sp>
       <p:sp>
         <p:nvSpPr>
-          <p:cNvPr id="32" name="Rounded Rectangle 31"/>
+          <p:cNvPr id="34" name="Rounded Rectangle 33"/>
           <p:cNvSpPr/>
           <p:nvPr/>
         </p:nvSpPr>
@@ -6392,7 +6480,7 @@
             </a:avLst>
           </a:prstGeom>
           <a:solidFill>
-            <a:srgbClr val="231C18"/>
+            <a:srgbClr val="18120E"/>
           </a:solidFill>
           <a:ln>
             <a:noFill/>
@@ -6423,7 +6511,7 @@
       </p:sp>
       <p:sp>
         <p:nvSpPr>
-          <p:cNvPr id="33" name="TextBox 32"/>
+          <p:cNvPr id="35" name="TextBox 34"/>
           <p:cNvSpPr txBox="1"/>
           <p:nvPr/>
         </p:nvSpPr>
@@ -6447,7 +6535,7 @@
             <a:r>
               <a:rPr sz="630" b="1" spc="60">
                 <a:solidFill>
-                  <a:srgbClr val="E8A98D"/>
+                  <a:srgbClr val="C9A15A"/>
                 </a:solidFill>
                 <a:latin typeface="Calibri"/>
               </a:rPr>
@@ -6458,7 +6546,7 @@
       </p:sp>
       <p:sp>
         <p:nvSpPr>
-          <p:cNvPr id="34" name="TextBox 33"/>
+          <p:cNvPr id="36" name="TextBox 35"/>
           <p:cNvSpPr txBox="1"/>
           <p:nvPr/>
         </p:nvSpPr>
@@ -6493,7 +6581,7 @@
       </p:sp>
       <p:sp>
         <p:nvSpPr>
-          <p:cNvPr id="35" name="TextBox 34"/>
+          <p:cNvPr id="37" name="TextBox 36"/>
           <p:cNvSpPr txBox="1"/>
           <p:nvPr/>
         </p:nvSpPr>
@@ -6528,7 +6616,7 @@
       </p:sp>
       <p:sp>
         <p:nvSpPr>
-          <p:cNvPr id="36" name="Rectangle 35"/>
+          <p:cNvPr id="38" name="Rectangle 37"/>
           <p:cNvSpPr/>
           <p:nvPr/>
         </p:nvSpPr>
@@ -6572,7 +6660,7 @@
       </p:sp>
       <p:sp>
         <p:nvSpPr>
-          <p:cNvPr id="37" name="TextBox 36"/>
+          <p:cNvPr id="39" name="TextBox 38"/>
           <p:cNvSpPr txBox="1"/>
           <p:nvPr/>
         </p:nvSpPr>
@@ -6596,7 +6684,7 @@
             <a:r>
               <a:rPr sz="730" b="0">
                 <a:solidFill>
-                  <a:srgbClr val="6E6760"/>
+                  <a:srgbClr val="6A5F56"/>
                 </a:solidFill>
                 <a:latin typeface="Calibri"/>
               </a:rPr>
@@ -6607,7 +6695,7 @@
       </p:sp>
       <p:sp>
         <p:nvSpPr>
-          <p:cNvPr id="38" name="TextBox 37"/>
+          <p:cNvPr id="40" name="TextBox 39"/>
           <p:cNvSpPr txBox="1"/>
           <p:nvPr/>
         </p:nvSpPr>
@@ -6631,7 +6719,7 @@
             <a:r>
               <a:rPr sz="930" b="1">
                 <a:solidFill>
-                  <a:srgbClr val="231C18"/>
+                  <a:srgbClr val="18120E"/>
                 </a:solidFill>
                 <a:latin typeface="Calibri"/>
               </a:rPr>
@@ -6642,7 +6730,7 @@
       </p:sp>
       <p:sp>
         <p:nvSpPr>
-          <p:cNvPr id="39" name="Rectangle 38"/>
+          <p:cNvPr id="41" name="Rectangle 40"/>
           <p:cNvSpPr/>
           <p:nvPr/>
         </p:nvSpPr>
@@ -6686,7 +6774,7 @@
       </p:sp>
       <p:sp>
         <p:nvSpPr>
-          <p:cNvPr id="40" name="TextBox 39"/>
+          <p:cNvPr id="42" name="TextBox 41"/>
           <p:cNvSpPr txBox="1"/>
           <p:nvPr/>
         </p:nvSpPr>
@@ -6710,7 +6798,7 @@
             <a:r>
               <a:rPr sz="730" b="0">
                 <a:solidFill>
-                  <a:srgbClr val="6E6760"/>
+                  <a:srgbClr val="6A5F56"/>
                 </a:solidFill>
                 <a:latin typeface="Calibri"/>
               </a:rPr>
@@ -6721,7 +6809,7 @@
       </p:sp>
       <p:sp>
         <p:nvSpPr>
-          <p:cNvPr id="41" name="TextBox 40"/>
+          <p:cNvPr id="43" name="TextBox 42"/>
           <p:cNvSpPr txBox="1"/>
           <p:nvPr/>
         </p:nvSpPr>
@@ -6745,7 +6833,7 @@
             <a:r>
               <a:rPr sz="930" b="1">
                 <a:solidFill>
-                  <a:srgbClr val="231C18"/>
+                  <a:srgbClr val="18120E"/>
                 </a:solidFill>
                 <a:latin typeface="Calibri"/>
               </a:rPr>
@@ -6756,7 +6844,7 @@
       </p:sp>
       <p:sp>
         <p:nvSpPr>
-          <p:cNvPr id="42" name="Rectangle 41"/>
+          <p:cNvPr id="44" name="Rectangle 43"/>
           <p:cNvSpPr/>
           <p:nvPr/>
         </p:nvSpPr>
@@ -6769,7 +6857,7 @@
             <a:avLst/>
           </a:prstGeom>
           <a:solidFill>
-            <a:srgbClr val="B23924"/>
+            <a:srgbClr val="2A211B"/>
           </a:solidFill>
           <a:ln>
             <a:noFill/>
@@ -6800,7 +6888,7 @@
       </p:sp>
       <p:sp>
         <p:nvSpPr>
-          <p:cNvPr id="43" name="Rounded Rectangle 42"/>
+          <p:cNvPr id="45" name="Rounded Rectangle 44"/>
           <p:cNvSpPr/>
           <p:nvPr/>
         </p:nvSpPr>
@@ -6817,7 +6905,7 @@
           <a:noFill/>
           <a:ln w="19050">
             <a:solidFill>
-              <a:srgbClr val="F3EADF"/>
+              <a:srgbClr val="C9A15A"/>
             </a:solidFill>
           </a:ln>
           <a:effectLst/>
@@ -6846,7 +6934,7 @@
       </p:sp>
       <p:sp>
         <p:nvSpPr>
-          <p:cNvPr id="44" name="Rounded Rectangle 43"/>
+          <p:cNvPr id="46" name="Rounded Rectangle 45"/>
           <p:cNvSpPr/>
           <p:nvPr/>
         </p:nvSpPr>
@@ -6863,7 +6951,7 @@
           <a:noFill/>
           <a:ln w="19050">
             <a:solidFill>
-              <a:srgbClr val="F3EADF"/>
+              <a:srgbClr val="C9A15A"/>
             </a:solidFill>
           </a:ln>
           <a:effectLst/>
@@ -6892,7 +6980,7 @@
       </p:sp>
       <p:sp>
         <p:nvSpPr>
-          <p:cNvPr id="45" name="Oval 44"/>
+          <p:cNvPr id="47" name="Oval 46"/>
           <p:cNvSpPr/>
           <p:nvPr/>
         </p:nvSpPr>
@@ -6907,7 +6995,7 @@
           <a:noFill/>
           <a:ln w="19050">
             <a:solidFill>
-              <a:srgbClr val="F3EADF"/>
+              <a:srgbClr val="C9A15A"/>
             </a:solidFill>
           </a:ln>
           <a:effectLst/>
@@ -6936,7 +7024,7 @@
       </p:sp>
       <p:sp>
         <p:nvSpPr>
-          <p:cNvPr id="46" name="TextBox 45"/>
+          <p:cNvPr id="48" name="TextBox 47"/>
           <p:cNvSpPr txBox="1"/>
           <p:nvPr/>
         </p:nvSpPr>
@@ -6960,7 +7048,7 @@
             <a:r>
               <a:rPr sz="950" b="1" spc="100">
                 <a:solidFill>
-                  <a:srgbClr val="F3EADF"/>
+                  <a:srgbClr val="C9A15A"/>
                 </a:solidFill>
                 <a:latin typeface="Calibri"/>
               </a:rPr>
@@ -6971,7 +7059,7 @@
       </p:sp>
       <p:sp>
         <p:nvSpPr>
-          <p:cNvPr id="47" name="Oval 46"/>
+          <p:cNvPr id="49" name="Oval 48"/>
           <p:cNvSpPr/>
           <p:nvPr/>
         </p:nvSpPr>
@@ -6984,7 +7072,7 @@
             <a:avLst/>
           </a:prstGeom>
           <a:solidFill>
-            <a:srgbClr val="B23924"/>
+            <a:srgbClr val="C72A1C"/>
           </a:solidFill>
           <a:ln>
             <a:noFill/>
@@ -7015,7 +7103,7 @@
       </p:sp>
       <p:sp>
         <p:nvSpPr>
-          <p:cNvPr id="48" name="TextBox 47"/>
+          <p:cNvPr id="50" name="TextBox 49"/>
           <p:cNvSpPr txBox="1"/>
           <p:nvPr/>
         </p:nvSpPr>
@@ -7039,7 +7127,7 @@
             <a:r>
               <a:rPr sz="730" b="1" spc="70">
                 <a:solidFill>
-                  <a:srgbClr val="231C18"/>
+                  <a:srgbClr val="18120E"/>
                 </a:solidFill>
                 <a:latin typeface="Calibri"/>
               </a:rPr>
@@ -7050,7 +7138,7 @@
       </p:sp>
       <p:sp>
         <p:nvSpPr>
-          <p:cNvPr id="49" name="TextBox 48"/>
+          <p:cNvPr id="51" name="TextBox 50"/>
           <p:cNvSpPr txBox="1"/>
           <p:nvPr/>
         </p:nvSpPr>
@@ -7078,7 +7166,7 @@
             <a:r>
               <a:rPr sz="1400" b="1">
                 <a:solidFill>
-                  <a:srgbClr val="231C18"/>
+                  <a:srgbClr val="18120E"/>
                 </a:solidFill>
                 <a:latin typeface="Calibri"/>
               </a:rPr>
@@ -7089,7 +7177,7 @@
       </p:sp>
       <p:sp>
         <p:nvSpPr>
-          <p:cNvPr id="50" name="TextBox 49"/>
+          <p:cNvPr id="52" name="TextBox 51"/>
           <p:cNvSpPr txBox="1"/>
           <p:nvPr/>
         </p:nvSpPr>
@@ -7117,7 +7205,7 @@
             <a:r>
               <a:rPr sz="830" b="0">
                 <a:solidFill>
-                  <a:srgbClr val="6E6760"/>
+                  <a:srgbClr val="6A5F56"/>
                 </a:solidFill>
                 <a:latin typeface="Calibri"/>
               </a:rPr>
@@ -7128,7 +7216,7 @@
       </p:sp>
       <p:sp>
         <p:nvSpPr>
-          <p:cNvPr id="51" name="Rounded Rectangle 50"/>
+          <p:cNvPr id="53" name="Rounded Rectangle 52"/>
           <p:cNvSpPr/>
           <p:nvPr/>
         </p:nvSpPr>
@@ -7143,7 +7231,7 @@
             </a:avLst>
           </a:prstGeom>
           <a:solidFill>
-            <a:srgbClr val="231C18"/>
+            <a:srgbClr val="18120E"/>
           </a:solidFill>
           <a:ln>
             <a:noFill/>
@@ -7174,7 +7262,7 @@
       </p:sp>
       <p:sp>
         <p:nvSpPr>
-          <p:cNvPr id="52" name="TextBox 51"/>
+          <p:cNvPr id="54" name="TextBox 53"/>
           <p:cNvSpPr txBox="1"/>
           <p:nvPr/>
         </p:nvSpPr>
@@ -7198,7 +7286,7 @@
             <a:r>
               <a:rPr sz="630" b="1" spc="60">
                 <a:solidFill>
-                  <a:srgbClr val="E8A98D"/>
+                  <a:srgbClr val="C9A15A"/>
                 </a:solidFill>
                 <a:latin typeface="Calibri"/>
               </a:rPr>
@@ -7209,7 +7297,7 @@
       </p:sp>
       <p:sp>
         <p:nvSpPr>
-          <p:cNvPr id="53" name="TextBox 52"/>
+          <p:cNvPr id="55" name="TextBox 54"/>
           <p:cNvSpPr txBox="1"/>
           <p:nvPr/>
         </p:nvSpPr>
@@ -7244,7 +7332,7 @@
       </p:sp>
       <p:sp>
         <p:nvSpPr>
-          <p:cNvPr id="54" name="TextBox 53"/>
+          <p:cNvPr id="56" name="TextBox 55"/>
           <p:cNvSpPr txBox="1"/>
           <p:nvPr/>
         </p:nvSpPr>
@@ -7279,7 +7367,7 @@
       </p:sp>
       <p:sp>
         <p:nvSpPr>
-          <p:cNvPr id="55" name="Rectangle 54"/>
+          <p:cNvPr id="57" name="Rectangle 56"/>
           <p:cNvSpPr/>
           <p:nvPr/>
         </p:nvSpPr>
@@ -7323,7 +7411,7 @@
       </p:sp>
       <p:sp>
         <p:nvSpPr>
-          <p:cNvPr id="56" name="TextBox 55"/>
+          <p:cNvPr id="58" name="TextBox 57"/>
           <p:cNvSpPr txBox="1"/>
           <p:nvPr/>
         </p:nvSpPr>
@@ -7347,7 +7435,7 @@
             <a:r>
               <a:rPr sz="730" b="0">
                 <a:solidFill>
-                  <a:srgbClr val="6E6760"/>
+                  <a:srgbClr val="6A5F56"/>
                 </a:solidFill>
                 <a:latin typeface="Calibri"/>
               </a:rPr>
@@ -7358,7 +7446,7 @@
       </p:sp>
       <p:sp>
         <p:nvSpPr>
-          <p:cNvPr id="57" name="TextBox 56"/>
+          <p:cNvPr id="59" name="TextBox 58"/>
           <p:cNvSpPr txBox="1"/>
           <p:nvPr/>
         </p:nvSpPr>
@@ -7382,7 +7470,7 @@
             <a:r>
               <a:rPr sz="930" b="1">
                 <a:solidFill>
-                  <a:srgbClr val="231C18"/>
+                  <a:srgbClr val="18120E"/>
                 </a:solidFill>
                 <a:latin typeface="Calibri"/>
               </a:rPr>
@@ -7393,7 +7481,7 @@
       </p:sp>
       <p:sp>
         <p:nvSpPr>
-          <p:cNvPr id="58" name="Rectangle 57"/>
+          <p:cNvPr id="60" name="Rectangle 59"/>
           <p:cNvSpPr/>
           <p:nvPr/>
         </p:nvSpPr>
@@ -7437,7 +7525,7 @@
       </p:sp>
       <p:sp>
         <p:nvSpPr>
-          <p:cNvPr id="59" name="TextBox 58"/>
+          <p:cNvPr id="61" name="TextBox 60"/>
           <p:cNvSpPr txBox="1"/>
           <p:nvPr/>
         </p:nvSpPr>
@@ -7461,7 +7549,7 @@
             <a:r>
               <a:rPr sz="730" b="0">
                 <a:solidFill>
-                  <a:srgbClr val="6E6760"/>
+                  <a:srgbClr val="6A5F56"/>
                 </a:solidFill>
                 <a:latin typeface="Calibri"/>
               </a:rPr>
@@ -7472,7 +7560,7 @@
       </p:sp>
       <p:sp>
         <p:nvSpPr>
-          <p:cNvPr id="60" name="TextBox 59"/>
+          <p:cNvPr id="62" name="TextBox 61"/>
           <p:cNvSpPr txBox="1"/>
           <p:nvPr/>
         </p:nvSpPr>
@@ -7496,7 +7584,7 @@
             <a:r>
               <a:rPr sz="930" b="1">
                 <a:solidFill>
-                  <a:srgbClr val="231C18"/>
+                  <a:srgbClr val="18120E"/>
                 </a:solidFill>
                 <a:latin typeface="Calibri"/>
               </a:rPr>
@@ -7507,7 +7595,7 @@
       </p:sp>
       <p:sp>
         <p:nvSpPr>
-          <p:cNvPr id="61" name="Rectangle 60"/>
+          <p:cNvPr id="63" name="Rectangle 62"/>
           <p:cNvSpPr/>
           <p:nvPr/>
         </p:nvSpPr>
@@ -7520,7 +7608,7 @@
             <a:avLst/>
           </a:prstGeom>
           <a:solidFill>
-            <a:srgbClr val="B23924"/>
+            <a:srgbClr val="C72A1C"/>
           </a:solidFill>
           <a:ln>
             <a:noFill/>
@@ -7551,7 +7639,7 @@
       </p:sp>
       <p:pic>
         <p:nvPicPr>
-          <p:cNvPr id="62" name="Picture 61" descr="sku_ms_nori.png"/>
+          <p:cNvPr id="64" name="Picture 63" descr="sku_ms_nori.png"/>
           <p:cNvPicPr>
             <a:picLocks noChangeAspect="1"/>
           </p:cNvPicPr>
@@ -7575,7 +7663,51 @@
       </p:pic>
       <p:sp>
         <p:nvSpPr>
-          <p:cNvPr id="63" name="Oval 62"/>
+          <p:cNvPr id="65" name="Rectangle 64"/>
+          <p:cNvSpPr/>
+          <p:nvPr/>
+        </p:nvSpPr>
+        <p:spPr>
+          <a:xfrm>
+            <a:off x="9132570" y="1298448"/>
+            <a:ext cx="2462022" cy="1554480"/>
+          </a:xfrm>
+          <a:prstGeom prst="rect">
+            <a:avLst/>
+          </a:prstGeom>
+          <a:noFill/>
+          <a:ln w="12700">
+            <a:solidFill>
+              <a:srgbClr val="C9A15A"/>
+            </a:solidFill>
+          </a:ln>
+          <a:effectLst/>
+        </p:spPr>
+        <p:style>
+          <a:lnRef idx="1">
+            <a:schemeClr val="accent1"/>
+          </a:lnRef>
+          <a:fillRef idx="3">
+            <a:schemeClr val="accent1"/>
+          </a:fillRef>
+          <a:effectRef idx="2">
+            <a:schemeClr val="accent1"/>
+          </a:effectRef>
+          <a:fontRef idx="minor">
+            <a:schemeClr val="lt1"/>
+          </a:fontRef>
+        </p:style>
+        <p:txBody>
+          <a:bodyPr rtlCol="0" anchor="ctr"/>
+          <a:lstStyle/>
+          <a:p>
+            <a:pPr algn="ctr"/>
+          </a:p>
+        </p:txBody>
+      </p:sp>
+      <p:sp>
+        <p:nvSpPr>
+          <p:cNvPr id="66" name="Oval 65"/>
           <p:cNvSpPr/>
           <p:nvPr/>
         </p:nvSpPr>
@@ -7588,7 +7720,7 @@
             <a:avLst/>
           </a:prstGeom>
           <a:solidFill>
-            <a:srgbClr val="B23924"/>
+            <a:srgbClr val="C72A1C"/>
           </a:solidFill>
           <a:ln>
             <a:noFill/>
@@ -7619,7 +7751,7 @@
       </p:sp>
       <p:sp>
         <p:nvSpPr>
-          <p:cNvPr id="64" name="TextBox 63"/>
+          <p:cNvPr id="67" name="TextBox 66"/>
           <p:cNvSpPr txBox="1"/>
           <p:nvPr/>
         </p:nvSpPr>
@@ -7643,7 +7775,7 @@
             <a:r>
               <a:rPr sz="730" b="1" spc="70">
                 <a:solidFill>
-                  <a:srgbClr val="231C18"/>
+                  <a:srgbClr val="18120E"/>
                 </a:solidFill>
                 <a:latin typeface="Calibri"/>
               </a:rPr>
@@ -7654,7 +7786,7 @@
       </p:sp>
       <p:sp>
         <p:nvSpPr>
-          <p:cNvPr id="65" name="TextBox 64"/>
+          <p:cNvPr id="68" name="TextBox 67"/>
           <p:cNvSpPr txBox="1"/>
           <p:nvPr/>
         </p:nvSpPr>
@@ -7682,7 +7814,7 @@
             <a:r>
               <a:rPr sz="1400" b="1">
                 <a:solidFill>
-                  <a:srgbClr val="231C18"/>
+                  <a:srgbClr val="18120E"/>
                 </a:solidFill>
                 <a:latin typeface="Calibri"/>
               </a:rPr>
@@ -7693,7 +7825,7 @@
       </p:sp>
       <p:sp>
         <p:nvSpPr>
-          <p:cNvPr id="66" name="TextBox 65"/>
+          <p:cNvPr id="69" name="TextBox 68"/>
           <p:cNvSpPr txBox="1"/>
           <p:nvPr/>
         </p:nvSpPr>
@@ -7721,7 +7853,7 @@
             <a:r>
               <a:rPr sz="830" b="0">
                 <a:solidFill>
-                  <a:srgbClr val="6E6760"/>
+                  <a:srgbClr val="6A5F56"/>
                 </a:solidFill>
                 <a:latin typeface="Calibri"/>
               </a:rPr>
@@ -7732,7 +7864,7 @@
       </p:sp>
       <p:sp>
         <p:nvSpPr>
-          <p:cNvPr id="67" name="Rounded Rectangle 66"/>
+          <p:cNvPr id="70" name="Rounded Rectangle 69"/>
           <p:cNvSpPr/>
           <p:nvPr/>
         </p:nvSpPr>
@@ -7747,7 +7879,7 @@
             </a:avLst>
           </a:prstGeom>
           <a:solidFill>
-            <a:srgbClr val="231C18"/>
+            <a:srgbClr val="18120E"/>
           </a:solidFill>
           <a:ln>
             <a:noFill/>
@@ -7778,7 +7910,7 @@
       </p:sp>
       <p:sp>
         <p:nvSpPr>
-          <p:cNvPr id="68" name="TextBox 67"/>
+          <p:cNvPr id="71" name="TextBox 70"/>
           <p:cNvSpPr txBox="1"/>
           <p:nvPr/>
         </p:nvSpPr>
@@ -7802,7 +7934,7 @@
             <a:r>
               <a:rPr sz="630" b="1" spc="60">
                 <a:solidFill>
-                  <a:srgbClr val="E8A98D"/>
+                  <a:srgbClr val="C9A15A"/>
                 </a:solidFill>
                 <a:latin typeface="Calibri"/>
               </a:rPr>
@@ -7813,7 +7945,7 @@
       </p:sp>
       <p:sp>
         <p:nvSpPr>
-          <p:cNvPr id="69" name="TextBox 68"/>
+          <p:cNvPr id="72" name="TextBox 71"/>
           <p:cNvSpPr txBox="1"/>
           <p:nvPr/>
         </p:nvSpPr>
@@ -7848,7 +7980,7 @@
       </p:sp>
       <p:sp>
         <p:nvSpPr>
-          <p:cNvPr id="70" name="TextBox 69"/>
+          <p:cNvPr id="73" name="TextBox 72"/>
           <p:cNvSpPr txBox="1"/>
           <p:nvPr/>
         </p:nvSpPr>
@@ -7883,7 +8015,7 @@
       </p:sp>
       <p:sp>
         <p:nvSpPr>
-          <p:cNvPr id="71" name="Rectangle 70"/>
+          <p:cNvPr id="74" name="Rectangle 73"/>
           <p:cNvSpPr/>
           <p:nvPr/>
         </p:nvSpPr>
@@ -7927,7 +8059,7 @@
       </p:sp>
       <p:sp>
         <p:nvSpPr>
-          <p:cNvPr id="72" name="TextBox 71"/>
+          <p:cNvPr id="75" name="TextBox 74"/>
           <p:cNvSpPr txBox="1"/>
           <p:nvPr/>
         </p:nvSpPr>
@@ -7951,7 +8083,7 @@
             <a:r>
               <a:rPr sz="730" b="0">
                 <a:solidFill>
-                  <a:srgbClr val="6E6760"/>
+                  <a:srgbClr val="6A5F56"/>
                 </a:solidFill>
                 <a:latin typeface="Calibri"/>
               </a:rPr>
@@ -7962,7 +8094,7 @@
       </p:sp>
       <p:sp>
         <p:nvSpPr>
-          <p:cNvPr id="73" name="TextBox 72"/>
+          <p:cNvPr id="76" name="TextBox 75"/>
           <p:cNvSpPr txBox="1"/>
           <p:nvPr/>
         </p:nvSpPr>
@@ -7986,7 +8118,7 @@
             <a:r>
               <a:rPr sz="930" b="1">
                 <a:solidFill>
-                  <a:srgbClr val="231C18"/>
+                  <a:srgbClr val="18120E"/>
                 </a:solidFill>
                 <a:latin typeface="Calibri"/>
               </a:rPr>
@@ -7997,7 +8129,7 @@
       </p:sp>
       <p:sp>
         <p:nvSpPr>
-          <p:cNvPr id="74" name="Rectangle 73"/>
+          <p:cNvPr id="77" name="Rectangle 76"/>
           <p:cNvSpPr/>
           <p:nvPr/>
         </p:nvSpPr>
@@ -8041,7 +8173,7 @@
       </p:sp>
       <p:sp>
         <p:nvSpPr>
-          <p:cNvPr id="75" name="TextBox 74"/>
+          <p:cNvPr id="78" name="TextBox 77"/>
           <p:cNvSpPr txBox="1"/>
           <p:nvPr/>
         </p:nvSpPr>
@@ -8065,7 +8197,7 @@
             <a:r>
               <a:rPr sz="730" b="0">
                 <a:solidFill>
-                  <a:srgbClr val="6E6760"/>
+                  <a:srgbClr val="6A5F56"/>
                 </a:solidFill>
                 <a:latin typeface="Calibri"/>
               </a:rPr>
@@ -8076,7 +8208,7 @@
       </p:sp>
       <p:sp>
         <p:nvSpPr>
-          <p:cNvPr id="76" name="TextBox 75"/>
+          <p:cNvPr id="79" name="TextBox 78"/>
           <p:cNvSpPr txBox="1"/>
           <p:nvPr/>
         </p:nvSpPr>
@@ -8100,7 +8232,7 @@
             <a:r>
               <a:rPr sz="930" b="1">
                 <a:solidFill>
-                  <a:srgbClr val="231C18"/>
+                  <a:srgbClr val="18120E"/>
                 </a:solidFill>
                 <a:latin typeface="Calibri"/>
               </a:rPr>
@@ -8111,7 +8243,7 @@
       </p:sp>
       <p:sp>
         <p:nvSpPr>
-          <p:cNvPr id="77" name="Rounded Rectangle 76"/>
+          <p:cNvPr id="80" name="Rounded Rectangle 79"/>
           <p:cNvSpPr/>
           <p:nvPr/>
         </p:nvSpPr>
@@ -8126,7 +8258,7 @@
             </a:avLst>
           </a:prstGeom>
           <a:solidFill>
-            <a:srgbClr val="231C18"/>
+            <a:srgbClr val="18120E"/>
           </a:solidFill>
           <a:ln>
             <a:noFill/>
@@ -8157,14 +8289,93 @@
       </p:sp>
       <p:sp>
         <p:nvSpPr>
-          <p:cNvPr id="78" name="TextBox 77"/>
-          <p:cNvSpPr txBox="1"/>
-          <p:nvPr/>
-        </p:nvSpPr>
-        <p:spPr>
-          <a:xfrm>
-            <a:off x="704088" y="6309360"/>
-            <a:ext cx="9902952" cy="384048"/>
+          <p:cNvPr id="81" name="Isosceles Triangle 80"/>
+          <p:cNvSpPr/>
+          <p:nvPr/>
+        </p:nvSpPr>
+        <p:spPr>
+          <a:xfrm>
+            <a:off x="685800" y="6364224"/>
+            <a:ext cx="237744" cy="213969"/>
+          </a:xfrm>
+          <a:prstGeom prst="triangle">
+            <a:avLst/>
+          </a:prstGeom>
+          <a:solidFill>
+            <a:srgbClr val="C9A15A"/>
+          </a:solidFill>
+          <a:ln>
+            <a:noFill/>
+          </a:ln>
+          <a:effectLst/>
+        </p:spPr>
+        <p:style>
+          <a:lnRef idx="1">
+            <a:schemeClr val="accent1"/>
+          </a:lnRef>
+          <a:fillRef idx="3">
+            <a:schemeClr val="accent1"/>
+          </a:fillRef>
+          <a:effectRef idx="2">
+            <a:schemeClr val="accent1"/>
+          </a:effectRef>
+          <a:fontRef idx="minor">
+            <a:schemeClr val="lt1"/>
+          </a:fontRef>
+        </p:style>
+        <p:txBody>
+          <a:bodyPr rtlCol="0" anchor="ctr"/>
+          <a:lstStyle/>
+          <a:p>
+            <a:pPr algn="ctr"/>
+          </a:p>
+        </p:txBody>
+      </p:sp>
+      <p:sp>
+        <p:nvSpPr>
+          <p:cNvPr id="82" name="TextBox 81"/>
+          <p:cNvSpPr txBox="1"/>
+          <p:nvPr/>
+        </p:nvSpPr>
+        <p:spPr>
+          <a:xfrm>
+            <a:off x="685800" y="6407017"/>
+            <a:ext cx="237744" cy="142646"/>
+          </a:xfrm>
+          <a:prstGeom prst="rect">
+            <a:avLst/>
+          </a:prstGeom>
+          <a:noFill/>
+        </p:spPr>
+        <p:txBody>
+          <a:bodyPr wrap="square" lIns="0" rIns="0" tIns="0" bIns="0" anchor="ctr">
+            <a:spAutoFit/>
+          </a:bodyPr>
+          <a:lstStyle/>
+          <a:p>
+            <a:pPr algn="ctr"/>
+            <a:r>
+              <a:rPr sz="1100" b="1">
+                <a:solidFill>
+                  <a:srgbClr val="18120E"/>
+                </a:solidFill>
+                <a:latin typeface="Calibri"/>
+              </a:rPr>
+              <a:t>!</a:t>
+            </a:r>
+          </a:p>
+        </p:txBody>
+      </p:sp>
+      <p:sp>
+        <p:nvSpPr>
+          <p:cNvPr id="83" name="TextBox 82"/>
+          <p:cNvSpPr txBox="1"/>
+          <p:nvPr/>
+        </p:nvSpPr>
+        <p:spPr>
+          <a:xfrm>
+            <a:off x="1069848" y="6309360"/>
+            <a:ext cx="9427464" cy="384048"/>
           </a:xfrm>
           <a:prstGeom prst="rect">
             <a:avLst/>
@@ -8189,14 +8400,14 @@
                 </a:solidFill>
                 <a:latin typeface="Calibri"/>
               </a:rPr>
-              <a:t>⚠ Смак «кімчі» відсутній у роздрібному каталозі постачальника — SKU та фото потребують підтвердження. Фото 25 і 50 г ідентичні: постачальник показує одну ілюстрацію пакування на смак.</a:t>
-            </a:r>
-          </a:p>
-        </p:txBody>
-      </p:sp>
-      <p:sp>
-        <p:nvSpPr>
-          <p:cNvPr id="79" name="TextBox 78"/>
+              <a:t>Смак «кімчі» відсутній у роздрібному каталозі постачальника — SKU та фото потребують підтвердження. Фото 25 і 50 г ідентичні: постачальник показує одну ілюстрацію пакування на смак.</a:t>
+            </a:r>
+          </a:p>
+        </p:txBody>
+      </p:sp>
+      <p:sp>
+        <p:nvSpPr>
+          <p:cNvPr id="84" name="TextBox 83"/>
           <p:cNvSpPr txBox="1"/>
           <p:nvPr/>
         </p:nvSpPr>
@@ -8306,7 +8517,7 @@
             <a:avLst/>
           </a:prstGeom>
           <a:solidFill>
-            <a:srgbClr val="231C18"/>
+            <a:srgbClr val="18120E"/>
           </a:solidFill>
           <a:ln>
             <a:noFill/>
@@ -8374,7 +8585,7 @@
             <a:avLst/>
           </a:prstGeom>
           <a:solidFill>
-            <a:srgbClr val="231C18"/>
+            <a:srgbClr val="18120E"/>
           </a:solidFill>
           <a:ln>
             <a:noFill/>
@@ -8457,7 +8668,7 @@
             <a:avLst/>
           </a:prstGeom>
           <a:solidFill>
-            <a:srgbClr val="B23924"/>
+            <a:srgbClr val="C72A1C"/>
           </a:solidFill>
           <a:ln>
             <a:noFill/>
@@ -8512,7 +8723,7 @@
             <a:r>
               <a:rPr sz="1050" b="1" spc="70">
                 <a:solidFill>
-                  <a:srgbClr val="B23924"/>
+                  <a:srgbClr val="C72A1C"/>
                 </a:solidFill>
                 <a:latin typeface="Calibri"/>
               </a:rPr>
@@ -8530,7 +8741,7 @@
         <p:spPr>
           <a:xfrm>
             <a:off x="502920" y="658368"/>
-            <a:ext cx="7178040" cy="1060704"/>
+            <a:ext cx="7178040" cy="1133856"/>
           </a:xfrm>
           <a:prstGeom prst="rect">
             <a:avLst/>
@@ -8549,11 +8760,11 @@
               </a:lnSpc>
             </a:pPr>
             <a:r>
-              <a:rPr sz="3400" b="1">
-                <a:solidFill>
-                  <a:srgbClr val="231C18"/>
-                </a:solidFill>
-                <a:latin typeface="Calibri"/>
+              <a:rPr sz="3600" b="1">
+                <a:solidFill>
+                  <a:srgbClr val="18120E"/>
+                </a:solidFill>
+                <a:latin typeface="Cambria"/>
               </a:rPr>
               <a:t>Takaokaya Co., Ltd.</a:t>
             </a:r>
@@ -8565,11 +8776,11 @@
               </a:lnSpc>
             </a:pPr>
             <a:r>
-              <a:rPr sz="3400" b="1">
-                <a:solidFill>
-                  <a:srgbClr val="231C18"/>
-                </a:solidFill>
-                <a:latin typeface="Calibri"/>
+              <a:rPr sz="3600" b="1">
+                <a:solidFill>
+                  <a:srgbClr val="18120E"/>
+                </a:solidFill>
+                <a:latin typeface="Cambria"/>
               </a:rPr>
               <a:t>(бренд Kinjirushi)</a:t>
             </a:r>
@@ -8584,7 +8795,7 @@
         </p:nvSpPr>
         <p:spPr>
           <a:xfrm>
-            <a:off x="502920" y="1792224"/>
+            <a:off x="502920" y="1865376"/>
             <a:ext cx="7178040" cy="274320"/>
           </a:xfrm>
           <a:prstGeom prst="rect">
@@ -8602,7 +8813,7 @@
             <a:r>
               <a:rPr sz="1350" b="0">
                 <a:solidFill>
-                  <a:srgbClr val="B23924"/>
+                  <a:srgbClr val="C72A1C"/>
                 </a:solidFill>
                 <a:latin typeface="Calibri"/>
               </a:rPr>
@@ -8619,7 +8830,7 @@
         </p:nvSpPr>
         <p:spPr>
           <a:xfrm>
-            <a:off x="502920" y="2121408"/>
+            <a:off x="502920" y="2194560"/>
             <a:ext cx="3006547" cy="365760"/>
           </a:xfrm>
           <a:prstGeom prst="roundRect">
@@ -8628,7 +8839,7 @@
             </a:avLst>
           </a:prstGeom>
           <a:solidFill>
-            <a:srgbClr val="B23924"/>
+            <a:srgbClr val="C72A1C"/>
           </a:solidFill>
           <a:ln>
             <a:noFill/>
@@ -8665,7 +8876,7 @@
         </p:nvSpPr>
         <p:spPr>
           <a:xfrm>
-            <a:off x="502920" y="2121408"/>
+            <a:off x="502920" y="2194560"/>
             <a:ext cx="3006547" cy="365760"/>
           </a:xfrm>
           <a:prstGeom prst="rect">
@@ -8700,7 +8911,7 @@
         </p:nvSpPr>
         <p:spPr>
           <a:xfrm>
-            <a:off x="502920" y="2615184"/>
+            <a:off x="502920" y="2688336"/>
             <a:ext cx="7178040" cy="1252728"/>
           </a:xfrm>
           <a:prstGeom prst="roundRect">
@@ -8709,7 +8920,7 @@
             </a:avLst>
           </a:prstGeom>
           <a:solidFill>
-            <a:srgbClr val="231C18"/>
+            <a:srgbClr val="18120E"/>
           </a:solidFill>
           <a:ln>
             <a:noFill/>
@@ -8746,7 +8957,7 @@
         </p:nvSpPr>
         <p:spPr>
           <a:xfrm>
-            <a:off x="758952" y="2779776"/>
+            <a:off x="758952" y="2852928"/>
             <a:ext cx="6665975" cy="182880"/>
           </a:xfrm>
           <a:prstGeom prst="rect">
@@ -8764,7 +8975,7 @@
             <a:r>
               <a:rPr sz="950" b="1" spc="80">
                 <a:solidFill>
-                  <a:srgbClr val="E8A98D"/>
+                  <a:srgbClr val="C9A15A"/>
                 </a:solidFill>
                 <a:latin typeface="Calibri"/>
               </a:rPr>
@@ -8781,7 +8992,7 @@
         </p:nvSpPr>
         <p:spPr>
           <a:xfrm>
-            <a:off x="758952" y="3008376"/>
+            <a:off x="758952" y="3081528"/>
             <a:ext cx="6665975" cy="795528"/>
           </a:xfrm>
           <a:prstGeom prst="rect">
@@ -8884,7 +9095,7 @@
         </p:nvSpPr>
         <p:spPr>
           <a:xfrm>
-            <a:off x="502920" y="4050791"/>
+            <a:off x="502920" y="4123944"/>
             <a:ext cx="3497579" cy="365760"/>
           </a:xfrm>
           <a:prstGeom prst="rect">
@@ -8900,11 +9111,11 @@
           <a:p>
             <a:pPr algn="l"/>
             <a:r>
-              <a:rPr sz="2700" b="1">
-                <a:solidFill>
-                  <a:srgbClr val="B23924"/>
-                </a:solidFill>
-                <a:latin typeface="Calibri"/>
+              <a:rPr sz="2800" b="1">
+                <a:solidFill>
+                  <a:srgbClr val="C72A1C"/>
+                </a:solidFill>
+                <a:latin typeface="Cambria"/>
               </a:rPr>
               <a:t>1929</a:t>
             </a:r>
@@ -8919,7 +9130,7 @@
         </p:nvSpPr>
         <p:spPr>
           <a:xfrm>
-            <a:off x="502920" y="4434840"/>
+            <a:off x="502920" y="4507992"/>
             <a:ext cx="3497579" cy="310896"/>
           </a:xfrm>
           <a:prstGeom prst="rect">
@@ -8941,7 +9152,7 @@
             <a:r>
               <a:rPr sz="830" b="0">
                 <a:solidFill>
-                  <a:srgbClr val="6E6760"/>
+                  <a:srgbClr val="6A5F56"/>
                 </a:solidFill>
                 <a:latin typeface="Calibri"/>
               </a:rPr>
@@ -8957,7 +9168,7 @@
             <a:r>
               <a:rPr sz="830" b="0">
                 <a:solidFill>
-                  <a:srgbClr val="6E6760"/>
+                  <a:srgbClr val="6A5F56"/>
                 </a:solidFill>
                 <a:latin typeface="Calibri"/>
               </a:rPr>
@@ -8974,7 +9185,7 @@
         </p:nvSpPr>
         <p:spPr>
           <a:xfrm>
-            <a:off x="4091939" y="4078224"/>
+            <a:off x="4091939" y="4151376"/>
             <a:ext cx="10058" cy="548640"/>
           </a:xfrm>
           <a:prstGeom prst="rect">
@@ -9018,7 +9229,7 @@
         </p:nvSpPr>
         <p:spPr>
           <a:xfrm>
-            <a:off x="4274820" y="4050791"/>
+            <a:off x="4274820" y="4123944"/>
             <a:ext cx="3314699" cy="365760"/>
           </a:xfrm>
           <a:prstGeom prst="rect">
@@ -9034,11 +9245,11 @@
           <a:p>
             <a:pPr algn="l"/>
             <a:r>
-              <a:rPr sz="2700" b="1">
-                <a:solidFill>
-                  <a:srgbClr val="B23924"/>
-                </a:solidFill>
-                <a:latin typeface="Calibri"/>
+              <a:rPr sz="2800" b="1">
+                <a:solidFill>
+                  <a:srgbClr val="C72A1C"/>
+                </a:solidFill>
+                <a:latin typeface="Cambria"/>
               </a:rPr>
               <a:t>45–60 г</a:t>
             </a:r>
@@ -9053,7 +9264,7 @@
         </p:nvSpPr>
         <p:spPr>
           <a:xfrm>
-            <a:off x="4274820" y="4434840"/>
+            <a:off x="4274820" y="4507992"/>
             <a:ext cx="3314699" cy="310896"/>
           </a:xfrm>
           <a:prstGeom prst="rect">
@@ -9075,7 +9286,7 @@
             <a:r>
               <a:rPr sz="830" b="0">
                 <a:solidFill>
-                  <a:srgbClr val="6E6760"/>
+                  <a:srgbClr val="6A5F56"/>
                 </a:solidFill>
                 <a:latin typeface="Calibri"/>
               </a:rPr>
@@ -9091,7 +9302,7 @@
             <a:r>
               <a:rPr sz="830" b="0">
                 <a:solidFill>
-                  <a:srgbClr val="6E6760"/>
+                  <a:srgbClr val="6A5F56"/>
                 </a:solidFill>
                 <a:latin typeface="Calibri"/>
               </a:rPr>
@@ -9108,7 +9319,7 @@
         </p:nvSpPr>
         <p:spPr>
           <a:xfrm>
-            <a:off x="521208" y="5070348"/>
+            <a:off x="521208" y="5143500"/>
             <a:ext cx="82296" cy="82296"/>
           </a:xfrm>
           <a:prstGeom prst="ellipse">
@@ -9152,7 +9363,7 @@
         </p:nvSpPr>
         <p:spPr>
           <a:xfrm>
-            <a:off x="685800" y="4965192"/>
+            <a:off x="685800" y="5038344"/>
             <a:ext cx="2142743" cy="292608"/>
           </a:xfrm>
           <a:prstGeom prst="rect">
@@ -9170,7 +9381,7 @@
             <a:r>
               <a:rPr sz="880" b="1">
                 <a:solidFill>
-                  <a:srgbClr val="231C18"/>
+                  <a:srgbClr val="18120E"/>
                 </a:solidFill>
                 <a:latin typeface="Calibri"/>
               </a:rPr>
@@ -9187,7 +9398,7 @@
         </p:nvSpPr>
         <p:spPr>
           <a:xfrm>
-            <a:off x="2938272" y="5070348"/>
+            <a:off x="2938272" y="5143500"/>
             <a:ext cx="82296" cy="82296"/>
           </a:xfrm>
           <a:prstGeom prst="ellipse">
@@ -9231,7 +9442,7 @@
         </p:nvSpPr>
         <p:spPr>
           <a:xfrm>
-            <a:off x="3102864" y="4965192"/>
+            <a:off x="3102864" y="5038344"/>
             <a:ext cx="2142743" cy="292608"/>
           </a:xfrm>
           <a:prstGeom prst="rect">
@@ -9249,7 +9460,7 @@
             <a:r>
               <a:rPr sz="880" b="1">
                 <a:solidFill>
-                  <a:srgbClr val="231C18"/>
+                  <a:srgbClr val="18120E"/>
                 </a:solidFill>
                 <a:latin typeface="Calibri"/>
               </a:rPr>
@@ -9266,7 +9477,7 @@
         </p:nvSpPr>
         <p:spPr>
           <a:xfrm>
-            <a:off x="5355335" y="5070348"/>
+            <a:off x="5355335" y="5143500"/>
             <a:ext cx="82296" cy="82296"/>
           </a:xfrm>
           <a:prstGeom prst="ellipse">
@@ -9310,7 +9521,7 @@
         </p:nvSpPr>
         <p:spPr>
           <a:xfrm>
-            <a:off x="5519928" y="4965192"/>
+            <a:off x="5519928" y="5038344"/>
             <a:ext cx="2142743" cy="292608"/>
           </a:xfrm>
           <a:prstGeom prst="rect">
@@ -9328,7 +9539,7 @@
             <a:r>
               <a:rPr sz="880" b="1">
                 <a:solidFill>
-                  <a:srgbClr val="231C18"/>
+                  <a:srgbClr val="18120E"/>
                 </a:solidFill>
                 <a:latin typeface="Calibri"/>
               </a:rPr>
@@ -9345,7 +9556,7 @@
         </p:nvSpPr>
         <p:spPr>
           <a:xfrm>
-            <a:off x="521208" y="5417820"/>
+            <a:off x="521208" y="5490972"/>
             <a:ext cx="82296" cy="82296"/>
           </a:xfrm>
           <a:prstGeom prst="ellipse">
@@ -9389,7 +9600,7 @@
         </p:nvSpPr>
         <p:spPr>
           <a:xfrm>
-            <a:off x="685800" y="5312664"/>
+            <a:off x="685800" y="5385816"/>
             <a:ext cx="2142743" cy="292608"/>
           </a:xfrm>
           <a:prstGeom prst="rect">
@@ -9407,7 +9618,7 @@
             <a:r>
               <a:rPr sz="880" b="1">
                 <a:solidFill>
-                  <a:srgbClr val="231C18"/>
+                  <a:srgbClr val="18120E"/>
                 </a:solidFill>
                 <a:latin typeface="Calibri"/>
               </a:rPr>
@@ -9424,7 +9635,7 @@
         </p:nvSpPr>
         <p:spPr>
           <a:xfrm>
-            <a:off x="2938272" y="5417820"/>
+            <a:off x="2938272" y="5490972"/>
             <a:ext cx="82296" cy="82296"/>
           </a:xfrm>
           <a:prstGeom prst="ellipse">
@@ -9468,7 +9679,7 @@
         </p:nvSpPr>
         <p:spPr>
           <a:xfrm>
-            <a:off x="3102864" y="5312664"/>
+            <a:off x="3102864" y="5385816"/>
             <a:ext cx="2142743" cy="292608"/>
           </a:xfrm>
           <a:prstGeom prst="rect">
@@ -9486,7 +9697,7 @@
             <a:r>
               <a:rPr sz="880" b="1">
                 <a:solidFill>
-                  <a:srgbClr val="231C18"/>
+                  <a:srgbClr val="18120E"/>
                 </a:solidFill>
                 <a:latin typeface="Calibri"/>
               </a:rPr>
@@ -9503,7 +9714,7 @@
         </p:nvSpPr>
         <p:spPr>
           <a:xfrm>
-            <a:off x="5355335" y="5417820"/>
+            <a:off x="5355335" y="5490972"/>
             <a:ext cx="82296" cy="82296"/>
           </a:xfrm>
           <a:prstGeom prst="ellipse">
@@ -9547,7 +9758,7 @@
         </p:nvSpPr>
         <p:spPr>
           <a:xfrm>
-            <a:off x="5519928" y="5312664"/>
+            <a:off x="5519928" y="5385816"/>
             <a:ext cx="2142743" cy="292608"/>
           </a:xfrm>
           <a:prstGeom prst="rect">
@@ -9565,7 +9776,7 @@
             <a:r>
               <a:rPr sz="880" b="1">
                 <a:solidFill>
-                  <a:srgbClr val="231C18"/>
+                  <a:srgbClr val="18120E"/>
                 </a:solidFill>
                 <a:latin typeface="Calibri"/>
               </a:rPr>
@@ -9582,7 +9793,7 @@
         </p:nvSpPr>
         <p:spPr>
           <a:xfrm>
-            <a:off x="521208" y="5765292"/>
+            <a:off x="521208" y="5838444"/>
             <a:ext cx="82296" cy="82296"/>
           </a:xfrm>
           <a:prstGeom prst="ellipse">
@@ -9626,7 +9837,7 @@
         </p:nvSpPr>
         <p:spPr>
           <a:xfrm>
-            <a:off x="685800" y="5660136"/>
+            <a:off x="685800" y="5733288"/>
             <a:ext cx="2142743" cy="292608"/>
           </a:xfrm>
           <a:prstGeom prst="rect">
@@ -9644,7 +9855,7 @@
             <a:r>
               <a:rPr sz="880" b="1">
                 <a:solidFill>
-                  <a:srgbClr val="231C18"/>
+                  <a:srgbClr val="18120E"/>
                 </a:solidFill>
                 <a:latin typeface="Calibri"/>
               </a:rPr>
@@ -9661,7 +9872,7 @@
         </p:nvSpPr>
         <p:spPr>
           <a:xfrm>
-            <a:off x="502920" y="6208776"/>
+            <a:off x="502920" y="6217920"/>
             <a:ext cx="7178040" cy="457200"/>
           </a:xfrm>
           <a:prstGeom prst="roundRect">
@@ -9670,7 +9881,7 @@
             </a:avLst>
           </a:prstGeom>
           <a:solidFill>
-            <a:srgbClr val="231C18"/>
+            <a:srgbClr val="18120E"/>
           </a:solidFill>
           <a:ln>
             <a:noFill/>
@@ -9701,14 +9912,93 @@
       </p:sp>
       <p:sp>
         <p:nvSpPr>
-          <p:cNvPr id="36" name="TextBox 35"/>
-          <p:cNvSpPr txBox="1"/>
-          <p:nvPr/>
-        </p:nvSpPr>
-        <p:spPr>
-          <a:xfrm>
-            <a:off x="704088" y="6208776"/>
-            <a:ext cx="6400800" cy="457200"/>
+          <p:cNvPr id="36" name="Isosceles Triangle 35"/>
+          <p:cNvSpPr/>
+          <p:nvPr/>
+        </p:nvSpPr>
+        <p:spPr>
+          <a:xfrm>
+            <a:off x="685800" y="6309359"/>
+            <a:ext cx="237744" cy="213969"/>
+          </a:xfrm>
+          <a:prstGeom prst="triangle">
+            <a:avLst/>
+          </a:prstGeom>
+          <a:solidFill>
+            <a:srgbClr val="C9A15A"/>
+          </a:solidFill>
+          <a:ln>
+            <a:noFill/>
+          </a:ln>
+          <a:effectLst/>
+        </p:spPr>
+        <p:style>
+          <a:lnRef idx="1">
+            <a:schemeClr val="accent1"/>
+          </a:lnRef>
+          <a:fillRef idx="3">
+            <a:schemeClr val="accent1"/>
+          </a:fillRef>
+          <a:effectRef idx="2">
+            <a:schemeClr val="accent1"/>
+          </a:effectRef>
+          <a:fontRef idx="minor">
+            <a:schemeClr val="lt1"/>
+          </a:fontRef>
+        </p:style>
+        <p:txBody>
+          <a:bodyPr rtlCol="0" anchor="ctr"/>
+          <a:lstStyle/>
+          <a:p>
+            <a:pPr algn="ctr"/>
+          </a:p>
+        </p:txBody>
+      </p:sp>
+      <p:sp>
+        <p:nvSpPr>
+          <p:cNvPr id="37" name="TextBox 36"/>
+          <p:cNvSpPr txBox="1"/>
+          <p:nvPr/>
+        </p:nvSpPr>
+        <p:spPr>
+          <a:xfrm>
+            <a:off x="685800" y="6352153"/>
+            <a:ext cx="237744" cy="142646"/>
+          </a:xfrm>
+          <a:prstGeom prst="rect">
+            <a:avLst/>
+          </a:prstGeom>
+          <a:noFill/>
+        </p:spPr>
+        <p:txBody>
+          <a:bodyPr wrap="square" lIns="0" rIns="0" tIns="0" bIns="0" anchor="ctr">
+            <a:spAutoFit/>
+          </a:bodyPr>
+          <a:lstStyle/>
+          <a:p>
+            <a:pPr algn="ctr"/>
+            <a:r>
+              <a:rPr sz="1100" b="1">
+                <a:solidFill>
+                  <a:srgbClr val="18120E"/>
+                </a:solidFill>
+                <a:latin typeface="Calibri"/>
+              </a:rPr>
+              <a:t>!</a:t>
+            </a:r>
+          </a:p>
+        </p:txBody>
+      </p:sp>
+      <p:sp>
+        <p:nvSpPr>
+          <p:cNvPr id="38" name="TextBox 37"/>
+          <p:cNvSpPr txBox="1"/>
+          <p:nvPr/>
+        </p:nvSpPr>
+        <p:spPr>
+          <a:xfrm>
+            <a:off x="1069848" y="6217920"/>
+            <a:ext cx="5925312" cy="457200"/>
           </a:xfrm>
           <a:prstGeom prst="rect">
             <a:avLst/>
@@ -9733,20 +10023,20 @@
                 </a:solidFill>
                 <a:latin typeface="Calibri"/>
               </a:rPr>
-              <a:t>⚠ Юридична особа й пряме контактне джерело постачальника в матеріалах компанії відсутні — профіль складено за відкритими даними бренду, потребує верифікації перед контрактом.</a:t>
-            </a:r>
-          </a:p>
-        </p:txBody>
-      </p:sp>
-      <p:sp>
-        <p:nvSpPr>
-          <p:cNvPr id="37" name="TextBox 36"/>
-          <p:cNvSpPr txBox="1"/>
-          <p:nvPr/>
-        </p:nvSpPr>
-        <p:spPr>
-          <a:xfrm>
-            <a:off x="7114032" y="6208776"/>
+              <a:t>Юридична особа й пряме контактне джерело постачальника в матеріалах компанії відсутні — профіль складено за відкритими даними бренду, потребує верифікації перед контрактом.</a:t>
+            </a:r>
+          </a:p>
+        </p:txBody>
+      </p:sp>
+      <p:sp>
+        <p:nvSpPr>
+          <p:cNvPr id="39" name="TextBox 38"/>
+          <p:cNvSpPr txBox="1"/>
+          <p:nvPr/>
+        </p:nvSpPr>
+        <p:spPr>
+          <a:xfrm>
+            <a:off x="7114032" y="6217920"/>
             <a:ext cx="429768" cy="457200"/>
           </a:xfrm>
           <a:prstGeom prst="rect">
@@ -9850,7 +10140,7 @@
             <a:avLst/>
           </a:prstGeom>
           <a:solidFill>
-            <a:srgbClr val="B23924"/>
+            <a:srgbClr val="C72A1C"/>
           </a:solidFill>
           <a:ln>
             <a:noFill/>
@@ -9905,7 +10195,7 @@
             <a:r>
               <a:rPr sz="1050" b="1" spc="70">
                 <a:solidFill>
-                  <a:srgbClr val="B23924"/>
+                  <a:srgbClr val="C72A1C"/>
                 </a:solidFill>
                 <a:latin typeface="Calibri"/>
               </a:rPr>
@@ -9922,8 +10212,8 @@
         </p:nvSpPr>
         <p:spPr>
           <a:xfrm>
-            <a:off x="502920" y="548640"/>
-            <a:ext cx="6949440" cy="502920"/>
+            <a:off x="502920" y="530352"/>
+            <a:ext cx="6949440" cy="548640"/>
           </a:xfrm>
           <a:prstGeom prst="rect">
             <a:avLst/>
@@ -9938,11 +10228,11 @@
           <a:p>
             <a:pPr algn="l"/>
             <a:r>
-              <a:rPr sz="3000" b="1">
-                <a:solidFill>
-                  <a:srgbClr val="231C18"/>
-                </a:solidFill>
-                <a:latin typeface="Calibri"/>
+              <a:rPr sz="3200" b="1">
+                <a:solidFill>
+                  <a:srgbClr val="18120E"/>
+                </a:solidFill>
+                <a:latin typeface="Cambria"/>
               </a:rPr>
               <a:t>Fresh-lock пляшки 50 г</a:t>
             </a:r>
@@ -9966,7 +10256,7 @@
             </a:avLst>
           </a:prstGeom>
           <a:solidFill>
-            <a:srgbClr val="B23924"/>
+            <a:srgbClr val="C72A1C"/>
           </a:solidFill>
           <a:ln>
             <a:noFill/>
@@ -10045,7 +10335,7 @@
             <a:avLst/>
           </a:prstGeom>
           <a:solidFill>
-            <a:srgbClr val="B23924"/>
+            <a:srgbClr val="2A211B"/>
           </a:solidFill>
           <a:ln>
             <a:noFill/>
@@ -10093,7 +10383,7 @@
           <a:noFill/>
           <a:ln w="19050">
             <a:solidFill>
-              <a:srgbClr val="F3EADF"/>
+              <a:srgbClr val="C9A15A"/>
             </a:solidFill>
           </a:ln>
           <a:effectLst/>
@@ -10139,7 +10429,7 @@
           <a:noFill/>
           <a:ln w="19050">
             <a:solidFill>
-              <a:srgbClr val="F3EADF"/>
+              <a:srgbClr val="C9A15A"/>
             </a:solidFill>
           </a:ln>
           <a:effectLst/>
@@ -10183,7 +10473,7 @@
           <a:noFill/>
           <a:ln w="19050">
             <a:solidFill>
-              <a:srgbClr val="F3EADF"/>
+              <a:srgbClr val="C9A15A"/>
             </a:solidFill>
           </a:ln>
           <a:effectLst/>
@@ -10236,7 +10526,7 @@
             <a:r>
               <a:rPr sz="950" b="1" spc="100">
                 <a:solidFill>
-                  <a:srgbClr val="F3EADF"/>
+                  <a:srgbClr val="C9A15A"/>
                 </a:solidFill>
                 <a:latin typeface="Calibri"/>
               </a:rPr>
@@ -10260,7 +10550,7 @@
             <a:avLst/>
           </a:prstGeom>
           <a:solidFill>
-            <a:srgbClr val="B23924"/>
+            <a:srgbClr val="C72A1C"/>
           </a:solidFill>
           <a:ln>
             <a:noFill/>
@@ -10315,7 +10605,7 @@
             <a:r>
               <a:rPr sz="730" b="1" spc="70">
                 <a:solidFill>
-                  <a:srgbClr val="231C18"/>
+                  <a:srgbClr val="18120E"/>
                 </a:solidFill>
                 <a:latin typeface="Calibri"/>
               </a:rPr>
@@ -10354,7 +10644,7 @@
             <a:r>
               <a:rPr sz="1400" b="1">
                 <a:solidFill>
-                  <a:srgbClr val="231C18"/>
+                  <a:srgbClr val="18120E"/>
                 </a:solidFill>
                 <a:latin typeface="Calibri"/>
               </a:rPr>
@@ -10393,7 +10683,7 @@
             <a:r>
               <a:rPr sz="830" b="0">
                 <a:solidFill>
-                  <a:srgbClr val="6E6760"/>
+                  <a:srgbClr val="6A5F56"/>
                 </a:solidFill>
                 <a:latin typeface="Calibri"/>
               </a:rPr>
@@ -10419,7 +10709,7 @@
             </a:avLst>
           </a:prstGeom>
           <a:solidFill>
-            <a:srgbClr val="231C18"/>
+            <a:srgbClr val="18120E"/>
           </a:solidFill>
           <a:ln>
             <a:noFill/>
@@ -10474,7 +10764,7 @@
             <a:r>
               <a:rPr sz="630" b="1" spc="60">
                 <a:solidFill>
-                  <a:srgbClr val="E8A98D"/>
+                  <a:srgbClr val="C9A15A"/>
                 </a:solidFill>
                 <a:latin typeface="Calibri"/>
               </a:rPr>
@@ -10623,7 +10913,7 @@
             <a:r>
               <a:rPr sz="730" b="0">
                 <a:solidFill>
-                  <a:srgbClr val="6E6760"/>
+                  <a:srgbClr val="6A5F56"/>
                 </a:solidFill>
                 <a:latin typeface="Calibri"/>
               </a:rPr>
@@ -10658,7 +10948,7 @@
             <a:r>
               <a:rPr sz="930" b="1">
                 <a:solidFill>
-                  <a:srgbClr val="231C18"/>
+                  <a:srgbClr val="18120E"/>
                 </a:solidFill>
                 <a:latin typeface="Calibri"/>
               </a:rPr>
@@ -10737,7 +11027,7 @@
             <a:r>
               <a:rPr sz="730" b="0">
                 <a:solidFill>
-                  <a:srgbClr val="6E6760"/>
+                  <a:srgbClr val="6A5F56"/>
                 </a:solidFill>
                 <a:latin typeface="Calibri"/>
               </a:rPr>
@@ -10772,7 +11062,7 @@
             <a:r>
               <a:rPr sz="930" b="1">
                 <a:solidFill>
-                  <a:srgbClr val="231C18"/>
+                  <a:srgbClr val="18120E"/>
                 </a:solidFill>
                 <a:latin typeface="Calibri"/>
               </a:rPr>
@@ -10796,7 +11086,7 @@
             <a:avLst/>
           </a:prstGeom>
           <a:solidFill>
-            <a:srgbClr val="B23924"/>
+            <a:srgbClr val="C72A1C"/>
           </a:solidFill>
           <a:ln>
             <a:noFill/>
@@ -10857,6 +11147,50 @@
         </p:nvSpPr>
         <p:spPr>
           <a:xfrm>
+            <a:off x="4413504" y="1298448"/>
+            <a:ext cx="3361944" cy="1554480"/>
+          </a:xfrm>
+          <a:prstGeom prst="rect">
+            <a:avLst/>
+          </a:prstGeom>
+          <a:noFill/>
+          <a:ln w="12700">
+            <a:solidFill>
+              <a:srgbClr val="C9A15A"/>
+            </a:solidFill>
+          </a:ln>
+          <a:effectLst/>
+        </p:spPr>
+        <p:style>
+          <a:lnRef idx="1">
+            <a:schemeClr val="accent1"/>
+          </a:lnRef>
+          <a:fillRef idx="3">
+            <a:schemeClr val="accent1"/>
+          </a:fillRef>
+          <a:effectRef idx="2">
+            <a:schemeClr val="accent1"/>
+          </a:effectRef>
+          <a:fontRef idx="minor">
+            <a:schemeClr val="lt1"/>
+          </a:fontRef>
+        </p:style>
+        <p:txBody>
+          <a:bodyPr rtlCol="0" anchor="ctr"/>
+          <a:lstStyle/>
+          <a:p>
+            <a:pPr algn="ctr"/>
+          </a:p>
+        </p:txBody>
+      </p:sp>
+      <p:sp>
+        <p:nvSpPr>
+          <p:cNvPr id="30" name="Rectangle 29"/>
+          <p:cNvSpPr/>
+          <p:nvPr/>
+        </p:nvSpPr>
+        <p:spPr>
+          <a:xfrm>
             <a:off x="4322064" y="2743199"/>
             <a:ext cx="3544824" cy="201168"/>
           </a:xfrm>
@@ -10864,7 +11198,7 @@
             <a:avLst/>
           </a:prstGeom>
           <a:solidFill>
-            <a:srgbClr val="8F2A19"/>
+            <a:srgbClr val="8A1C12"/>
           </a:solidFill>
           <a:ln>
             <a:noFill/>
@@ -10895,7 +11229,7 @@
       </p:sp>
       <p:sp>
         <p:nvSpPr>
-          <p:cNvPr id="30" name="TextBox 29"/>
+          <p:cNvPr id="31" name="TextBox 30"/>
           <p:cNvSpPr txBox="1"/>
           <p:nvPr/>
         </p:nvSpPr>
@@ -10930,7 +11264,7 @@
       </p:sp>
       <p:sp>
         <p:nvSpPr>
-          <p:cNvPr id="31" name="Oval 30"/>
+          <p:cNvPr id="32" name="Oval 31"/>
           <p:cNvSpPr/>
           <p:nvPr/>
         </p:nvSpPr>
@@ -10943,7 +11277,7 @@
             <a:avLst/>
           </a:prstGeom>
           <a:solidFill>
-            <a:srgbClr val="B23924"/>
+            <a:srgbClr val="C72A1C"/>
           </a:solidFill>
           <a:ln>
             <a:noFill/>
@@ -10974,7 +11308,7 @@
       </p:sp>
       <p:sp>
         <p:nvSpPr>
-          <p:cNvPr id="32" name="TextBox 31"/>
+          <p:cNvPr id="33" name="TextBox 32"/>
           <p:cNvSpPr txBox="1"/>
           <p:nvPr/>
         </p:nvSpPr>
@@ -10998,7 +11332,7 @@
             <a:r>
               <a:rPr sz="730" b="1" spc="70">
                 <a:solidFill>
-                  <a:srgbClr val="231C18"/>
+                  <a:srgbClr val="18120E"/>
                 </a:solidFill>
                 <a:latin typeface="Calibri"/>
               </a:rPr>
@@ -11009,7 +11343,7 @@
       </p:sp>
       <p:sp>
         <p:nvSpPr>
-          <p:cNvPr id="33" name="TextBox 32"/>
+          <p:cNvPr id="34" name="TextBox 33"/>
           <p:cNvSpPr txBox="1"/>
           <p:nvPr/>
         </p:nvSpPr>
@@ -11037,7 +11371,7 @@
             <a:r>
               <a:rPr sz="1400" b="1">
                 <a:solidFill>
-                  <a:srgbClr val="231C18"/>
+                  <a:srgbClr val="18120E"/>
                 </a:solidFill>
                 <a:latin typeface="Calibri"/>
               </a:rPr>
@@ -11048,7 +11382,7 @@
       </p:sp>
       <p:sp>
         <p:nvSpPr>
-          <p:cNvPr id="34" name="TextBox 33"/>
+          <p:cNvPr id="35" name="TextBox 34"/>
           <p:cNvSpPr txBox="1"/>
           <p:nvPr/>
         </p:nvSpPr>
@@ -11076,7 +11410,7 @@
             <a:r>
               <a:rPr sz="830" b="0">
                 <a:solidFill>
-                  <a:srgbClr val="6E6760"/>
+                  <a:srgbClr val="6A5F56"/>
                 </a:solidFill>
                 <a:latin typeface="Calibri"/>
               </a:rPr>
@@ -11087,7 +11421,7 @@
       </p:sp>
       <p:sp>
         <p:nvSpPr>
-          <p:cNvPr id="35" name="Rounded Rectangle 34"/>
+          <p:cNvPr id="36" name="Rounded Rectangle 35"/>
           <p:cNvSpPr/>
           <p:nvPr/>
         </p:nvSpPr>
@@ -11102,7 +11436,7 @@
             </a:avLst>
           </a:prstGeom>
           <a:solidFill>
-            <a:srgbClr val="231C18"/>
+            <a:srgbClr val="18120E"/>
           </a:solidFill>
           <a:ln>
             <a:noFill/>
@@ -11133,7 +11467,7 @@
       </p:sp>
       <p:sp>
         <p:nvSpPr>
-          <p:cNvPr id="36" name="TextBox 35"/>
+          <p:cNvPr id="37" name="TextBox 36"/>
           <p:cNvSpPr txBox="1"/>
           <p:nvPr/>
         </p:nvSpPr>
@@ -11157,7 +11491,7 @@
             <a:r>
               <a:rPr sz="630" b="1" spc="60">
                 <a:solidFill>
-                  <a:srgbClr val="E8A98D"/>
+                  <a:srgbClr val="C9A15A"/>
                 </a:solidFill>
                 <a:latin typeface="Calibri"/>
               </a:rPr>
@@ -11168,7 +11502,7 @@
       </p:sp>
       <p:sp>
         <p:nvSpPr>
-          <p:cNvPr id="37" name="TextBox 36"/>
+          <p:cNvPr id="38" name="TextBox 37"/>
           <p:cNvSpPr txBox="1"/>
           <p:nvPr/>
         </p:nvSpPr>
@@ -11203,7 +11537,7 @@
       </p:sp>
       <p:sp>
         <p:nvSpPr>
-          <p:cNvPr id="38" name="TextBox 37"/>
+          <p:cNvPr id="39" name="TextBox 38"/>
           <p:cNvSpPr txBox="1"/>
           <p:nvPr/>
         </p:nvSpPr>
@@ -11238,7 +11572,7 @@
       </p:sp>
       <p:sp>
         <p:nvSpPr>
-          <p:cNvPr id="39" name="Rectangle 38"/>
+          <p:cNvPr id="40" name="Rectangle 39"/>
           <p:cNvSpPr/>
           <p:nvPr/>
         </p:nvSpPr>
@@ -11282,7 +11616,7 @@
       </p:sp>
       <p:sp>
         <p:nvSpPr>
-          <p:cNvPr id="40" name="TextBox 39"/>
+          <p:cNvPr id="41" name="TextBox 40"/>
           <p:cNvSpPr txBox="1"/>
           <p:nvPr/>
         </p:nvSpPr>
@@ -11306,7 +11640,7 @@
             <a:r>
               <a:rPr sz="730" b="0">
                 <a:solidFill>
-                  <a:srgbClr val="6E6760"/>
+                  <a:srgbClr val="6A5F56"/>
                 </a:solidFill>
                 <a:latin typeface="Calibri"/>
               </a:rPr>
@@ -11317,7 +11651,7 @@
       </p:sp>
       <p:sp>
         <p:nvSpPr>
-          <p:cNvPr id="41" name="TextBox 40"/>
+          <p:cNvPr id="42" name="TextBox 41"/>
           <p:cNvSpPr txBox="1"/>
           <p:nvPr/>
         </p:nvSpPr>
@@ -11341,7 +11675,7 @@
             <a:r>
               <a:rPr sz="930" b="1">
                 <a:solidFill>
-                  <a:srgbClr val="231C18"/>
+                  <a:srgbClr val="18120E"/>
                 </a:solidFill>
                 <a:latin typeface="Calibri"/>
               </a:rPr>
@@ -11352,7 +11686,7 @@
       </p:sp>
       <p:sp>
         <p:nvSpPr>
-          <p:cNvPr id="42" name="Rectangle 41"/>
+          <p:cNvPr id="43" name="Rectangle 42"/>
           <p:cNvSpPr/>
           <p:nvPr/>
         </p:nvSpPr>
@@ -11396,7 +11730,7 @@
       </p:sp>
       <p:sp>
         <p:nvSpPr>
-          <p:cNvPr id="43" name="TextBox 42"/>
+          <p:cNvPr id="44" name="TextBox 43"/>
           <p:cNvSpPr txBox="1"/>
           <p:nvPr/>
         </p:nvSpPr>
@@ -11420,7 +11754,7 @@
             <a:r>
               <a:rPr sz="730" b="0">
                 <a:solidFill>
-                  <a:srgbClr val="6E6760"/>
+                  <a:srgbClr val="6A5F56"/>
                 </a:solidFill>
                 <a:latin typeface="Calibri"/>
               </a:rPr>
@@ -11431,7 +11765,7 @@
       </p:sp>
       <p:sp>
         <p:nvSpPr>
-          <p:cNvPr id="44" name="TextBox 43"/>
+          <p:cNvPr id="45" name="TextBox 44"/>
           <p:cNvSpPr txBox="1"/>
           <p:nvPr/>
         </p:nvSpPr>
@@ -11455,7 +11789,7 @@
             <a:r>
               <a:rPr sz="930" b="1">
                 <a:solidFill>
-                  <a:srgbClr val="231C18"/>
+                  <a:srgbClr val="18120E"/>
                 </a:solidFill>
                 <a:latin typeface="Calibri"/>
               </a:rPr>
@@ -11466,7 +11800,7 @@
       </p:sp>
       <p:sp>
         <p:nvSpPr>
-          <p:cNvPr id="45" name="Rectangle 44"/>
+          <p:cNvPr id="46" name="Rectangle 45"/>
           <p:cNvSpPr/>
           <p:nvPr/>
         </p:nvSpPr>
@@ -11479,7 +11813,7 @@
             <a:avLst/>
           </a:prstGeom>
           <a:solidFill>
-            <a:srgbClr val="B23924"/>
+            <a:srgbClr val="2A211B"/>
           </a:solidFill>
           <a:ln>
             <a:noFill/>
@@ -11510,7 +11844,7 @@
       </p:sp>
       <p:sp>
         <p:nvSpPr>
-          <p:cNvPr id="46" name="Rounded Rectangle 45"/>
+          <p:cNvPr id="47" name="Rounded Rectangle 46"/>
           <p:cNvSpPr/>
           <p:nvPr/>
         </p:nvSpPr>
@@ -11527,7 +11861,7 @@
           <a:noFill/>
           <a:ln w="19050">
             <a:solidFill>
-              <a:srgbClr val="F3EADF"/>
+              <a:srgbClr val="C9A15A"/>
             </a:solidFill>
           </a:ln>
           <a:effectLst/>
@@ -11556,7 +11890,7 @@
       </p:sp>
       <p:sp>
         <p:nvSpPr>
-          <p:cNvPr id="47" name="Rounded Rectangle 46"/>
+          <p:cNvPr id="48" name="Rounded Rectangle 47"/>
           <p:cNvSpPr/>
           <p:nvPr/>
         </p:nvSpPr>
@@ -11573,7 +11907,7 @@
           <a:noFill/>
           <a:ln w="19050">
             <a:solidFill>
-              <a:srgbClr val="F3EADF"/>
+              <a:srgbClr val="C9A15A"/>
             </a:solidFill>
           </a:ln>
           <a:effectLst/>
@@ -11602,7 +11936,7 @@
       </p:sp>
       <p:sp>
         <p:nvSpPr>
-          <p:cNvPr id="48" name="Oval 47"/>
+          <p:cNvPr id="49" name="Oval 48"/>
           <p:cNvSpPr/>
           <p:nvPr/>
         </p:nvSpPr>
@@ -11617,7 +11951,7 @@
           <a:noFill/>
           <a:ln w="19050">
             <a:solidFill>
-              <a:srgbClr val="F3EADF"/>
+              <a:srgbClr val="C9A15A"/>
             </a:solidFill>
           </a:ln>
           <a:effectLst/>
@@ -11646,7 +11980,7 @@
       </p:sp>
       <p:sp>
         <p:nvSpPr>
-          <p:cNvPr id="49" name="TextBox 48"/>
+          <p:cNvPr id="50" name="TextBox 49"/>
           <p:cNvSpPr txBox="1"/>
           <p:nvPr/>
         </p:nvSpPr>
@@ -11670,7 +12004,7 @@
             <a:r>
               <a:rPr sz="950" b="1" spc="100">
                 <a:solidFill>
-                  <a:srgbClr val="F3EADF"/>
+                  <a:srgbClr val="C9A15A"/>
                 </a:solidFill>
                 <a:latin typeface="Calibri"/>
               </a:rPr>
@@ -11681,7 +12015,7 @@
       </p:sp>
       <p:sp>
         <p:nvSpPr>
-          <p:cNvPr id="50" name="Oval 49"/>
+          <p:cNvPr id="51" name="Oval 50"/>
           <p:cNvSpPr/>
           <p:nvPr/>
         </p:nvSpPr>
@@ -11694,7 +12028,7 @@
             <a:avLst/>
           </a:prstGeom>
           <a:solidFill>
-            <a:srgbClr val="B23924"/>
+            <a:srgbClr val="C72A1C"/>
           </a:solidFill>
           <a:ln>
             <a:noFill/>
@@ -11725,7 +12059,7 @@
       </p:sp>
       <p:sp>
         <p:nvSpPr>
-          <p:cNvPr id="51" name="TextBox 50"/>
+          <p:cNvPr id="52" name="TextBox 51"/>
           <p:cNvSpPr txBox="1"/>
           <p:nvPr/>
         </p:nvSpPr>
@@ -11749,7 +12083,7 @@
             <a:r>
               <a:rPr sz="730" b="1" spc="70">
                 <a:solidFill>
-                  <a:srgbClr val="231C18"/>
+                  <a:srgbClr val="18120E"/>
                 </a:solidFill>
                 <a:latin typeface="Calibri"/>
               </a:rPr>
@@ -11760,7 +12094,7 @@
       </p:sp>
       <p:sp>
         <p:nvSpPr>
-          <p:cNvPr id="52" name="TextBox 51"/>
+          <p:cNvPr id="53" name="TextBox 52"/>
           <p:cNvSpPr txBox="1"/>
           <p:nvPr/>
         </p:nvSpPr>
@@ -11788,7 +12122,7 @@
             <a:r>
               <a:rPr sz="1400" b="1">
                 <a:solidFill>
-                  <a:srgbClr val="231C18"/>
+                  <a:srgbClr val="18120E"/>
                 </a:solidFill>
                 <a:latin typeface="Calibri"/>
               </a:rPr>
@@ -11799,7 +12133,7 @@
       </p:sp>
       <p:sp>
         <p:nvSpPr>
-          <p:cNvPr id="53" name="TextBox 52"/>
+          <p:cNvPr id="54" name="TextBox 53"/>
           <p:cNvSpPr txBox="1"/>
           <p:nvPr/>
         </p:nvSpPr>
@@ -11827,7 +12161,7 @@
             <a:r>
               <a:rPr sz="830" b="0">
                 <a:solidFill>
-                  <a:srgbClr val="6E6760"/>
+                  <a:srgbClr val="6A5F56"/>
                 </a:solidFill>
                 <a:latin typeface="Calibri"/>
               </a:rPr>
@@ -11838,7 +12172,7 @@
       </p:sp>
       <p:sp>
         <p:nvSpPr>
-          <p:cNvPr id="54" name="Rounded Rectangle 53"/>
+          <p:cNvPr id="55" name="Rounded Rectangle 54"/>
           <p:cNvSpPr/>
           <p:nvPr/>
         </p:nvSpPr>
@@ -11853,7 +12187,7 @@
             </a:avLst>
           </a:prstGeom>
           <a:solidFill>
-            <a:srgbClr val="231C18"/>
+            <a:srgbClr val="18120E"/>
           </a:solidFill>
           <a:ln>
             <a:noFill/>
@@ -11884,7 +12218,7 @@
       </p:sp>
       <p:sp>
         <p:nvSpPr>
-          <p:cNvPr id="55" name="TextBox 54"/>
+          <p:cNvPr id="56" name="TextBox 55"/>
           <p:cNvSpPr txBox="1"/>
           <p:nvPr/>
         </p:nvSpPr>
@@ -11908,7 +12242,7 @@
             <a:r>
               <a:rPr sz="630" b="1" spc="60">
                 <a:solidFill>
-                  <a:srgbClr val="E8A98D"/>
+                  <a:srgbClr val="C9A15A"/>
                 </a:solidFill>
                 <a:latin typeface="Calibri"/>
               </a:rPr>
@@ -11919,7 +12253,7 @@
       </p:sp>
       <p:sp>
         <p:nvSpPr>
-          <p:cNvPr id="56" name="TextBox 55"/>
+          <p:cNvPr id="57" name="TextBox 56"/>
           <p:cNvSpPr txBox="1"/>
           <p:nvPr/>
         </p:nvSpPr>
@@ -11954,7 +12288,7 @@
       </p:sp>
       <p:sp>
         <p:nvSpPr>
-          <p:cNvPr id="57" name="TextBox 56"/>
+          <p:cNvPr id="58" name="TextBox 57"/>
           <p:cNvSpPr txBox="1"/>
           <p:nvPr/>
         </p:nvSpPr>
@@ -11989,7 +12323,7 @@
       </p:sp>
       <p:sp>
         <p:nvSpPr>
-          <p:cNvPr id="58" name="Rectangle 57"/>
+          <p:cNvPr id="59" name="Rectangle 58"/>
           <p:cNvSpPr/>
           <p:nvPr/>
         </p:nvSpPr>
@@ -12033,7 +12367,7 @@
       </p:sp>
       <p:sp>
         <p:nvSpPr>
-          <p:cNvPr id="59" name="TextBox 58"/>
+          <p:cNvPr id="60" name="TextBox 59"/>
           <p:cNvSpPr txBox="1"/>
           <p:nvPr/>
         </p:nvSpPr>
@@ -12057,7 +12391,7 @@
             <a:r>
               <a:rPr sz="730" b="0">
                 <a:solidFill>
-                  <a:srgbClr val="6E6760"/>
+                  <a:srgbClr val="6A5F56"/>
                 </a:solidFill>
                 <a:latin typeface="Calibri"/>
               </a:rPr>
@@ -12068,7 +12402,7 @@
       </p:sp>
       <p:sp>
         <p:nvSpPr>
-          <p:cNvPr id="60" name="TextBox 59"/>
+          <p:cNvPr id="61" name="TextBox 60"/>
           <p:cNvSpPr txBox="1"/>
           <p:nvPr/>
         </p:nvSpPr>
@@ -12092,7 +12426,7 @@
             <a:r>
               <a:rPr sz="930" b="1">
                 <a:solidFill>
-                  <a:srgbClr val="231C18"/>
+                  <a:srgbClr val="18120E"/>
                 </a:solidFill>
                 <a:latin typeface="Calibri"/>
               </a:rPr>
@@ -12103,7 +12437,7 @@
       </p:sp>
       <p:sp>
         <p:nvSpPr>
-          <p:cNvPr id="61" name="Rectangle 60"/>
+          <p:cNvPr id="62" name="Rectangle 61"/>
           <p:cNvSpPr/>
           <p:nvPr/>
         </p:nvSpPr>
@@ -12147,7 +12481,7 @@
       </p:sp>
       <p:sp>
         <p:nvSpPr>
-          <p:cNvPr id="62" name="TextBox 61"/>
+          <p:cNvPr id="63" name="TextBox 62"/>
           <p:cNvSpPr txBox="1"/>
           <p:nvPr/>
         </p:nvSpPr>
@@ -12171,7 +12505,7 @@
             <a:r>
               <a:rPr sz="730" b="0">
                 <a:solidFill>
-                  <a:srgbClr val="6E6760"/>
+                  <a:srgbClr val="6A5F56"/>
                 </a:solidFill>
                 <a:latin typeface="Calibri"/>
               </a:rPr>
@@ -12182,7 +12516,7 @@
       </p:sp>
       <p:sp>
         <p:nvSpPr>
-          <p:cNvPr id="63" name="TextBox 62"/>
+          <p:cNvPr id="64" name="TextBox 63"/>
           <p:cNvSpPr txBox="1"/>
           <p:nvPr/>
         </p:nvSpPr>
@@ -12206,7 +12540,7 @@
             <a:r>
               <a:rPr sz="930" b="1">
                 <a:solidFill>
-                  <a:srgbClr val="231C18"/>
+                  <a:srgbClr val="18120E"/>
                 </a:solidFill>
                 <a:latin typeface="Calibri"/>
               </a:rPr>
@@ -12217,7 +12551,7 @@
       </p:sp>
       <p:sp>
         <p:nvSpPr>
-          <p:cNvPr id="64" name="Rounded Rectangle 63"/>
+          <p:cNvPr id="65" name="Rounded Rectangle 64"/>
           <p:cNvSpPr/>
           <p:nvPr/>
         </p:nvSpPr>
@@ -12232,7 +12566,7 @@
             </a:avLst>
           </a:prstGeom>
           <a:solidFill>
-            <a:srgbClr val="231C18"/>
+            <a:srgbClr val="18120E"/>
           </a:solidFill>
           <a:ln>
             <a:noFill/>
@@ -12263,14 +12597,93 @@
       </p:sp>
       <p:sp>
         <p:nvSpPr>
-          <p:cNvPr id="65" name="TextBox 64"/>
-          <p:cNvSpPr txBox="1"/>
-          <p:nvPr/>
-        </p:nvSpPr>
-        <p:spPr>
-          <a:xfrm>
-            <a:off x="704088" y="6309360"/>
-            <a:ext cx="9902952" cy="384048"/>
+          <p:cNvPr id="66" name="Isosceles Triangle 65"/>
+          <p:cNvSpPr/>
+          <p:nvPr/>
+        </p:nvSpPr>
+        <p:spPr>
+          <a:xfrm>
+            <a:off x="685800" y="6364224"/>
+            <a:ext cx="237744" cy="213969"/>
+          </a:xfrm>
+          <a:prstGeom prst="triangle">
+            <a:avLst/>
+          </a:prstGeom>
+          <a:solidFill>
+            <a:srgbClr val="C9A15A"/>
+          </a:solidFill>
+          <a:ln>
+            <a:noFill/>
+          </a:ln>
+          <a:effectLst/>
+        </p:spPr>
+        <p:style>
+          <a:lnRef idx="1">
+            <a:schemeClr val="accent1"/>
+          </a:lnRef>
+          <a:fillRef idx="3">
+            <a:schemeClr val="accent1"/>
+          </a:fillRef>
+          <a:effectRef idx="2">
+            <a:schemeClr val="accent1"/>
+          </a:effectRef>
+          <a:fontRef idx="minor">
+            <a:schemeClr val="lt1"/>
+          </a:fontRef>
+        </p:style>
+        <p:txBody>
+          <a:bodyPr rtlCol="0" anchor="ctr"/>
+          <a:lstStyle/>
+          <a:p>
+            <a:pPr algn="ctr"/>
+          </a:p>
+        </p:txBody>
+      </p:sp>
+      <p:sp>
+        <p:nvSpPr>
+          <p:cNvPr id="67" name="TextBox 66"/>
+          <p:cNvSpPr txBox="1"/>
+          <p:nvPr/>
+        </p:nvSpPr>
+        <p:spPr>
+          <a:xfrm>
+            <a:off x="685800" y="6407017"/>
+            <a:ext cx="237744" cy="142646"/>
+          </a:xfrm>
+          <a:prstGeom prst="rect">
+            <a:avLst/>
+          </a:prstGeom>
+          <a:noFill/>
+        </p:spPr>
+        <p:txBody>
+          <a:bodyPr wrap="square" lIns="0" rIns="0" tIns="0" bIns="0" anchor="ctr">
+            <a:spAutoFit/>
+          </a:bodyPr>
+          <a:lstStyle/>
+          <a:p>
+            <a:pPr algn="ctr"/>
+            <a:r>
+              <a:rPr sz="1100" b="1">
+                <a:solidFill>
+                  <a:srgbClr val="18120E"/>
+                </a:solidFill>
+                <a:latin typeface="Calibri"/>
+              </a:rPr>
+              <a:t>!</a:t>
+            </a:r>
+          </a:p>
+        </p:txBody>
+      </p:sp>
+      <p:sp>
+        <p:nvSpPr>
+          <p:cNvPr id="68" name="TextBox 67"/>
+          <p:cNvSpPr txBox="1"/>
+          <p:nvPr/>
+        </p:nvSpPr>
+        <p:spPr>
+          <a:xfrm>
+            <a:off x="1069848" y="6309360"/>
+            <a:ext cx="9427464" cy="384048"/>
           </a:xfrm>
           <a:prstGeom prst="rect">
             <a:avLst/>
@@ -12295,14 +12708,14 @@
                 </a:solidFill>
                 <a:latin typeface="Calibri"/>
               </a:rPr>
-              <a:t>⚠ Позиції 1 і 2 мають однакову закупівельну ціну незалежно від смаку — типово для непроробленого прайсу; варто запросити поартикульну котирувку.</a:t>
-            </a:r>
-          </a:p>
-        </p:txBody>
-      </p:sp>
-      <p:sp>
-        <p:nvSpPr>
-          <p:cNvPr id="66" name="TextBox 65"/>
+              <a:t>Позиції 1 і 2 мають однакову закупівельну ціну незалежно від смаку — типово для непроробленого прайсу; варто запросити поартикульну котирувку.</a:t>
+            </a:r>
+          </a:p>
+        </p:txBody>
+      </p:sp>
+      <p:sp>
+        <p:nvSpPr>
+          <p:cNvPr id="69" name="TextBox 68"/>
           <p:cNvSpPr txBox="1"/>
           <p:nvPr/>
         </p:nvSpPr>
@@ -12412,7 +12825,7 @@
             <a:avLst/>
           </a:prstGeom>
           <a:solidFill>
-            <a:srgbClr val="B23924"/>
+            <a:srgbClr val="C72A1C"/>
           </a:solidFill>
           <a:ln>
             <a:noFill/>
@@ -12467,7 +12880,7 @@
             <a:r>
               <a:rPr sz="1050" b="1" spc="70">
                 <a:solidFill>
-                  <a:srgbClr val="B23924"/>
+                  <a:srgbClr val="C72A1C"/>
                 </a:solidFill>
                 <a:latin typeface="Calibri"/>
               </a:rPr>
@@ -12484,8 +12897,8 @@
         </p:nvSpPr>
         <p:spPr>
           <a:xfrm>
-            <a:off x="502920" y="548640"/>
-            <a:ext cx="6949440" cy="502920"/>
+            <a:off x="502920" y="530352"/>
+            <a:ext cx="6949440" cy="548640"/>
           </a:xfrm>
           <a:prstGeom prst="rect">
             <a:avLst/>
@@ -12500,11 +12913,11 @@
           <a:p>
             <a:pPr algn="l"/>
             <a:r>
-              <a:rPr sz="3000" b="1">
-                <a:solidFill>
-                  <a:srgbClr val="231C18"/>
-                </a:solidFill>
-                <a:latin typeface="Calibri"/>
+              <a:rPr sz="3200" b="1">
+                <a:solidFill>
+                  <a:srgbClr val="18120E"/>
+                </a:solidFill>
+                <a:latin typeface="Cambria"/>
               </a:rPr>
               <a:t>Фасовка 45–60 г</a:t>
             </a:r>
@@ -12528,7 +12941,7 @@
             </a:avLst>
           </a:prstGeom>
           <a:solidFill>
-            <a:srgbClr val="B23924"/>
+            <a:srgbClr val="C72A1C"/>
           </a:solidFill>
           <a:ln>
             <a:noFill/>
@@ -12607,7 +13020,7 @@
             <a:avLst/>
           </a:prstGeom>
           <a:solidFill>
-            <a:srgbClr val="B23924"/>
+            <a:srgbClr val="2A211B"/>
           </a:solidFill>
           <a:ln>
             <a:noFill/>
@@ -12655,7 +13068,7 @@
           <a:noFill/>
           <a:ln w="19050">
             <a:solidFill>
-              <a:srgbClr val="F3EADF"/>
+              <a:srgbClr val="C9A15A"/>
             </a:solidFill>
           </a:ln>
           <a:effectLst/>
@@ -12701,7 +13114,7 @@
           <a:noFill/>
           <a:ln w="19050">
             <a:solidFill>
-              <a:srgbClr val="F3EADF"/>
+              <a:srgbClr val="C9A15A"/>
             </a:solidFill>
           </a:ln>
           <a:effectLst/>
@@ -12745,7 +13158,7 @@
           <a:noFill/>
           <a:ln w="19050">
             <a:solidFill>
-              <a:srgbClr val="F3EADF"/>
+              <a:srgbClr val="C9A15A"/>
             </a:solidFill>
           </a:ln>
           <a:effectLst/>
@@ -12798,7 +13211,7 @@
             <a:r>
               <a:rPr sz="950" b="1" spc="100">
                 <a:solidFill>
-                  <a:srgbClr val="F3EADF"/>
+                  <a:srgbClr val="C9A15A"/>
                 </a:solidFill>
                 <a:latin typeface="Calibri"/>
               </a:rPr>
@@ -12822,7 +13235,7 @@
             <a:avLst/>
           </a:prstGeom>
           <a:solidFill>
-            <a:srgbClr val="B23924"/>
+            <a:srgbClr val="C72A1C"/>
           </a:solidFill>
           <a:ln>
             <a:noFill/>
@@ -12877,7 +13290,7 @@
             <a:r>
               <a:rPr sz="730" b="1" spc="70">
                 <a:solidFill>
-                  <a:srgbClr val="231C18"/>
+                  <a:srgbClr val="18120E"/>
                 </a:solidFill>
                 <a:latin typeface="Calibri"/>
               </a:rPr>
@@ -12916,7 +13329,7 @@
             <a:r>
               <a:rPr sz="1400" b="1">
                 <a:solidFill>
-                  <a:srgbClr val="231C18"/>
+                  <a:srgbClr val="18120E"/>
                 </a:solidFill>
                 <a:latin typeface="Calibri"/>
               </a:rPr>
@@ -12955,7 +13368,7 @@
             <a:r>
               <a:rPr sz="830" b="0">
                 <a:solidFill>
-                  <a:srgbClr val="6E6760"/>
+                  <a:srgbClr val="6A5F56"/>
                 </a:solidFill>
                 <a:latin typeface="Calibri"/>
               </a:rPr>
@@ -12981,7 +13394,7 @@
             </a:avLst>
           </a:prstGeom>
           <a:solidFill>
-            <a:srgbClr val="231C18"/>
+            <a:srgbClr val="18120E"/>
           </a:solidFill>
           <a:ln>
             <a:noFill/>
@@ -13036,7 +13449,7 @@
             <a:r>
               <a:rPr sz="630" b="1" spc="60">
                 <a:solidFill>
-                  <a:srgbClr val="E8A98D"/>
+                  <a:srgbClr val="C9A15A"/>
                 </a:solidFill>
                 <a:latin typeface="Calibri"/>
               </a:rPr>
@@ -13185,7 +13598,7 @@
             <a:r>
               <a:rPr sz="730" b="0">
                 <a:solidFill>
-                  <a:srgbClr val="6E6760"/>
+                  <a:srgbClr val="6A5F56"/>
                 </a:solidFill>
                 <a:latin typeface="Calibri"/>
               </a:rPr>
@@ -13220,7 +13633,7 @@
             <a:r>
               <a:rPr sz="930" b="1">
                 <a:solidFill>
-                  <a:srgbClr val="231C18"/>
+                  <a:srgbClr val="18120E"/>
                 </a:solidFill>
                 <a:latin typeface="Calibri"/>
               </a:rPr>
@@ -13299,7 +13712,7 @@
             <a:r>
               <a:rPr sz="730" b="0">
                 <a:solidFill>
-                  <a:srgbClr val="6E6760"/>
+                  <a:srgbClr val="6A5F56"/>
                 </a:solidFill>
                 <a:latin typeface="Calibri"/>
               </a:rPr>
@@ -13334,7 +13747,7 @@
             <a:r>
               <a:rPr sz="930" b="1">
                 <a:solidFill>
-                  <a:srgbClr val="231C18"/>
+                  <a:srgbClr val="18120E"/>
                 </a:solidFill>
                 <a:latin typeface="Calibri"/>
               </a:rPr>
@@ -13358,7 +13771,7 @@
             <a:avLst/>
           </a:prstGeom>
           <a:solidFill>
-            <a:srgbClr val="B23924"/>
+            <a:srgbClr val="2A211B"/>
           </a:solidFill>
           <a:ln>
             <a:noFill/>
@@ -13406,7 +13819,7 @@
           <a:noFill/>
           <a:ln w="19050">
             <a:solidFill>
-              <a:srgbClr val="F3EADF"/>
+              <a:srgbClr val="C9A15A"/>
             </a:solidFill>
           </a:ln>
           <a:effectLst/>
@@ -13452,7 +13865,7 @@
           <a:noFill/>
           <a:ln w="19050">
             <a:solidFill>
-              <a:srgbClr val="F3EADF"/>
+              <a:srgbClr val="C9A15A"/>
             </a:solidFill>
           </a:ln>
           <a:effectLst/>
@@ -13496,7 +13909,7 @@
           <a:noFill/>
           <a:ln w="19050">
             <a:solidFill>
-              <a:srgbClr val="F3EADF"/>
+              <a:srgbClr val="C9A15A"/>
             </a:solidFill>
           </a:ln>
           <a:effectLst/>
@@ -13549,7 +13962,7 @@
             <a:r>
               <a:rPr sz="950" b="1" spc="100">
                 <a:solidFill>
-                  <a:srgbClr val="F3EADF"/>
+                  <a:srgbClr val="C9A15A"/>
                 </a:solidFill>
                 <a:latin typeface="Calibri"/>
               </a:rPr>
@@ -13573,7 +13986,7 @@
             <a:avLst/>
           </a:prstGeom>
           <a:solidFill>
-            <a:srgbClr val="B23924"/>
+            <a:srgbClr val="C72A1C"/>
           </a:solidFill>
           <a:ln>
             <a:noFill/>
@@ -13628,7 +14041,7 @@
             <a:r>
               <a:rPr sz="730" b="1" spc="70">
                 <a:solidFill>
-                  <a:srgbClr val="231C18"/>
+                  <a:srgbClr val="18120E"/>
                 </a:solidFill>
                 <a:latin typeface="Calibri"/>
               </a:rPr>
@@ -13667,7 +14080,7 @@
             <a:r>
               <a:rPr sz="1400" b="1">
                 <a:solidFill>
-                  <a:srgbClr val="231C18"/>
+                  <a:srgbClr val="18120E"/>
                 </a:solidFill>
                 <a:latin typeface="Calibri"/>
               </a:rPr>
@@ -13706,7 +14119,7 @@
             <a:r>
               <a:rPr sz="830" b="0">
                 <a:solidFill>
-                  <a:srgbClr val="6E6760"/>
+                  <a:srgbClr val="6A5F56"/>
                 </a:solidFill>
                 <a:latin typeface="Calibri"/>
               </a:rPr>
@@ -13732,7 +14145,7 @@
             </a:avLst>
           </a:prstGeom>
           <a:solidFill>
-            <a:srgbClr val="231C18"/>
+            <a:srgbClr val="18120E"/>
           </a:solidFill>
           <a:ln>
             <a:noFill/>
@@ -13787,7 +14200,7 @@
             <a:r>
               <a:rPr sz="630" b="1" spc="60">
                 <a:solidFill>
-                  <a:srgbClr val="E8A98D"/>
+                  <a:srgbClr val="C9A15A"/>
                 </a:solidFill>
                 <a:latin typeface="Calibri"/>
               </a:rPr>
@@ -13936,7 +14349,7 @@
             <a:r>
               <a:rPr sz="730" b="0">
                 <a:solidFill>
-                  <a:srgbClr val="6E6760"/>
+                  <a:srgbClr val="6A5F56"/>
                 </a:solidFill>
                 <a:latin typeface="Calibri"/>
               </a:rPr>
@@ -13971,7 +14384,7 @@
             <a:r>
               <a:rPr sz="930" b="1">
                 <a:solidFill>
-                  <a:srgbClr val="231C18"/>
+                  <a:srgbClr val="18120E"/>
                 </a:solidFill>
                 <a:latin typeface="Calibri"/>
               </a:rPr>
@@ -14050,7 +14463,7 @@
             <a:r>
               <a:rPr sz="730" b="0">
                 <a:solidFill>
-                  <a:srgbClr val="6E6760"/>
+                  <a:srgbClr val="6A5F56"/>
                 </a:solidFill>
                 <a:latin typeface="Calibri"/>
               </a:rPr>
@@ -14085,7 +14498,7 @@
             <a:r>
               <a:rPr sz="930" b="1">
                 <a:solidFill>
-                  <a:srgbClr val="231C18"/>
+                  <a:srgbClr val="18120E"/>
                 </a:solidFill>
                 <a:latin typeface="Calibri"/>
               </a:rPr>
@@ -14109,7 +14522,7 @@
             <a:avLst/>
           </a:prstGeom>
           <a:solidFill>
-            <a:srgbClr val="B23924"/>
+            <a:srgbClr val="2A211B"/>
           </a:solidFill>
           <a:ln>
             <a:noFill/>
@@ -14157,7 +14570,7 @@
           <a:noFill/>
           <a:ln w="19050">
             <a:solidFill>
-              <a:srgbClr val="F3EADF"/>
+              <a:srgbClr val="C9A15A"/>
             </a:solidFill>
           </a:ln>
           <a:effectLst/>
@@ -14203,7 +14616,7 @@
           <a:noFill/>
           <a:ln w="19050">
             <a:solidFill>
-              <a:srgbClr val="F3EADF"/>
+              <a:srgbClr val="C9A15A"/>
             </a:solidFill>
           </a:ln>
           <a:effectLst/>
@@ -14247,7 +14660,7 @@
           <a:noFill/>
           <a:ln w="19050">
             <a:solidFill>
-              <a:srgbClr val="F3EADF"/>
+              <a:srgbClr val="C9A15A"/>
             </a:solidFill>
           </a:ln>
           <a:effectLst/>
@@ -14300,7 +14713,7 @@
             <a:r>
               <a:rPr sz="950" b="1" spc="100">
                 <a:solidFill>
-                  <a:srgbClr val="F3EADF"/>
+                  <a:srgbClr val="C9A15A"/>
                 </a:solidFill>
                 <a:latin typeface="Calibri"/>
               </a:rPr>
@@ -14324,7 +14737,7 @@
             <a:avLst/>
           </a:prstGeom>
           <a:solidFill>
-            <a:srgbClr val="B23924"/>
+            <a:srgbClr val="C72A1C"/>
           </a:solidFill>
           <a:ln>
             <a:noFill/>
@@ -14379,7 +14792,7 @@
             <a:r>
               <a:rPr sz="730" b="1" spc="70">
                 <a:solidFill>
-                  <a:srgbClr val="231C18"/>
+                  <a:srgbClr val="18120E"/>
                 </a:solidFill>
                 <a:latin typeface="Calibri"/>
               </a:rPr>
@@ -14418,7 +14831,7 @@
             <a:r>
               <a:rPr sz="1400" b="1">
                 <a:solidFill>
-                  <a:srgbClr val="231C18"/>
+                  <a:srgbClr val="18120E"/>
                 </a:solidFill>
                 <a:latin typeface="Calibri"/>
               </a:rPr>
@@ -14457,7 +14870,7 @@
             <a:r>
               <a:rPr sz="830" b="0">
                 <a:solidFill>
-                  <a:srgbClr val="6E6760"/>
+                  <a:srgbClr val="6A5F56"/>
                 </a:solidFill>
                 <a:latin typeface="Calibri"/>
               </a:rPr>
@@ -14483,7 +14896,7 @@
             </a:avLst>
           </a:prstGeom>
           <a:solidFill>
-            <a:srgbClr val="231C18"/>
+            <a:srgbClr val="18120E"/>
           </a:solidFill>
           <a:ln>
             <a:noFill/>
@@ -14538,7 +14951,7 @@
             <a:r>
               <a:rPr sz="630" b="1" spc="60">
                 <a:solidFill>
-                  <a:srgbClr val="E8A98D"/>
+                  <a:srgbClr val="C9A15A"/>
                 </a:solidFill>
                 <a:latin typeface="Calibri"/>
               </a:rPr>
@@ -14687,7 +15100,7 @@
             <a:r>
               <a:rPr sz="730" b="0">
                 <a:solidFill>
-                  <a:srgbClr val="6E6760"/>
+                  <a:srgbClr val="6A5F56"/>
                 </a:solidFill>
                 <a:latin typeface="Calibri"/>
               </a:rPr>
@@ -14722,7 +15135,7 @@
             <a:r>
               <a:rPr sz="930" b="1">
                 <a:solidFill>
-                  <a:srgbClr val="231C18"/>
+                  <a:srgbClr val="18120E"/>
                 </a:solidFill>
                 <a:latin typeface="Calibri"/>
               </a:rPr>
@@ -14801,7 +15214,7 @@
             <a:r>
               <a:rPr sz="730" b="0">
                 <a:solidFill>
-                  <a:srgbClr val="6E6760"/>
+                  <a:srgbClr val="6A5F56"/>
                 </a:solidFill>
                 <a:latin typeface="Calibri"/>
               </a:rPr>
@@ -14836,7 +15249,7 @@
             <a:r>
               <a:rPr sz="930" b="1">
                 <a:solidFill>
-                  <a:srgbClr val="231C18"/>
+                  <a:srgbClr val="18120E"/>
                 </a:solidFill>
                 <a:latin typeface="Calibri"/>
               </a:rPr>
@@ -14860,7 +15273,7 @@
             <a:avLst/>
           </a:prstGeom>
           <a:solidFill>
-            <a:srgbClr val="B23924"/>
+            <a:srgbClr val="2A211B"/>
           </a:solidFill>
           <a:ln>
             <a:noFill/>
@@ -14908,7 +15321,7 @@
           <a:noFill/>
           <a:ln w="19050">
             <a:solidFill>
-              <a:srgbClr val="F3EADF"/>
+              <a:srgbClr val="C9A15A"/>
             </a:solidFill>
           </a:ln>
           <a:effectLst/>
@@ -14954,7 +15367,7 @@
           <a:noFill/>
           <a:ln w="19050">
             <a:solidFill>
-              <a:srgbClr val="F3EADF"/>
+              <a:srgbClr val="C9A15A"/>
             </a:solidFill>
           </a:ln>
           <a:effectLst/>
@@ -14998,7 +15411,7 @@
           <a:noFill/>
           <a:ln w="19050">
             <a:solidFill>
-              <a:srgbClr val="F3EADF"/>
+              <a:srgbClr val="C9A15A"/>
             </a:solidFill>
           </a:ln>
           <a:effectLst/>
@@ -15051,7 +15464,7 @@
             <a:r>
               <a:rPr sz="950" b="1" spc="100">
                 <a:solidFill>
-                  <a:srgbClr val="F3EADF"/>
+                  <a:srgbClr val="C9A15A"/>
                 </a:solidFill>
                 <a:latin typeface="Calibri"/>
               </a:rPr>
@@ -15075,7 +15488,7 @@
             <a:avLst/>
           </a:prstGeom>
           <a:solidFill>
-            <a:srgbClr val="B23924"/>
+            <a:srgbClr val="C72A1C"/>
           </a:solidFill>
           <a:ln>
             <a:noFill/>
@@ -15130,7 +15543,7 @@
             <a:r>
               <a:rPr sz="730" b="1" spc="70">
                 <a:solidFill>
-                  <a:srgbClr val="231C18"/>
+                  <a:srgbClr val="18120E"/>
                 </a:solidFill>
                 <a:latin typeface="Calibri"/>
               </a:rPr>
@@ -15169,7 +15582,7 @@
             <a:r>
               <a:rPr sz="1400" b="1">
                 <a:solidFill>
-                  <a:srgbClr val="231C18"/>
+                  <a:srgbClr val="18120E"/>
                 </a:solidFill>
                 <a:latin typeface="Calibri"/>
               </a:rPr>
@@ -15208,7 +15621,7 @@
             <a:r>
               <a:rPr sz="830" b="0">
                 <a:solidFill>
-                  <a:srgbClr val="6E6760"/>
+                  <a:srgbClr val="6A5F56"/>
                 </a:solidFill>
                 <a:latin typeface="Calibri"/>
               </a:rPr>
@@ -15234,7 +15647,7 @@
             </a:avLst>
           </a:prstGeom>
           <a:solidFill>
-            <a:srgbClr val="231C18"/>
+            <a:srgbClr val="18120E"/>
           </a:solidFill>
           <a:ln>
             <a:noFill/>
@@ -15289,7 +15702,7 @@
             <a:r>
               <a:rPr sz="630" b="1" spc="60">
                 <a:solidFill>
-                  <a:srgbClr val="E8A98D"/>
+                  <a:srgbClr val="C9A15A"/>
                 </a:solidFill>
                 <a:latin typeface="Calibri"/>
               </a:rPr>
@@ -15438,7 +15851,7 @@
             <a:r>
               <a:rPr sz="730" b="0">
                 <a:solidFill>
-                  <a:srgbClr val="6E6760"/>
+                  <a:srgbClr val="6A5F56"/>
                 </a:solidFill>
                 <a:latin typeface="Calibri"/>
               </a:rPr>
@@ -15473,7 +15886,7 @@
             <a:r>
               <a:rPr sz="930" b="1">
                 <a:solidFill>
-                  <a:srgbClr val="231C18"/>
+                  <a:srgbClr val="18120E"/>
                 </a:solidFill>
                 <a:latin typeface="Calibri"/>
               </a:rPr>
@@ -15552,7 +15965,7 @@
             <a:r>
               <a:rPr sz="730" b="0">
                 <a:solidFill>
-                  <a:srgbClr val="6E6760"/>
+                  <a:srgbClr val="6A5F56"/>
                 </a:solidFill>
                 <a:latin typeface="Calibri"/>
               </a:rPr>
@@ -15587,7 +16000,7 @@
             <a:r>
               <a:rPr sz="930" b="1">
                 <a:solidFill>
-                  <a:srgbClr val="231C18"/>
+                  <a:srgbClr val="18120E"/>
                 </a:solidFill>
                 <a:latin typeface="Calibri"/>
               </a:rPr>
@@ -15613,7 +16026,7 @@
             </a:avLst>
           </a:prstGeom>
           <a:solidFill>
-            <a:srgbClr val="231C18"/>
+            <a:srgbClr val="18120E"/>
           </a:solidFill>
           <a:ln>
             <a:noFill/>
@@ -15644,14 +16057,93 @@
       </p:sp>
       <p:sp>
         <p:nvSpPr>
-          <p:cNvPr id="85" name="TextBox 84"/>
-          <p:cNvSpPr txBox="1"/>
-          <p:nvPr/>
-        </p:nvSpPr>
-        <p:spPr>
-          <a:xfrm>
-            <a:off x="704088" y="6309360"/>
-            <a:ext cx="9902952" cy="384048"/>
+          <p:cNvPr id="85" name="Isosceles Triangle 84"/>
+          <p:cNvSpPr/>
+          <p:nvPr/>
+        </p:nvSpPr>
+        <p:spPr>
+          <a:xfrm>
+            <a:off x="685800" y="6364224"/>
+            <a:ext cx="237744" cy="213969"/>
+          </a:xfrm>
+          <a:prstGeom prst="triangle">
+            <a:avLst/>
+          </a:prstGeom>
+          <a:solidFill>
+            <a:srgbClr val="C9A15A"/>
+          </a:solidFill>
+          <a:ln>
+            <a:noFill/>
+          </a:ln>
+          <a:effectLst/>
+        </p:spPr>
+        <p:style>
+          <a:lnRef idx="1">
+            <a:schemeClr val="accent1"/>
+          </a:lnRef>
+          <a:fillRef idx="3">
+            <a:schemeClr val="accent1"/>
+          </a:fillRef>
+          <a:effectRef idx="2">
+            <a:schemeClr val="accent1"/>
+          </a:effectRef>
+          <a:fontRef idx="minor">
+            <a:schemeClr val="lt1"/>
+          </a:fontRef>
+        </p:style>
+        <p:txBody>
+          <a:bodyPr rtlCol="0" anchor="ctr"/>
+          <a:lstStyle/>
+          <a:p>
+            <a:pPr algn="ctr"/>
+          </a:p>
+        </p:txBody>
+      </p:sp>
+      <p:sp>
+        <p:nvSpPr>
+          <p:cNvPr id="86" name="TextBox 85"/>
+          <p:cNvSpPr txBox="1"/>
+          <p:nvPr/>
+        </p:nvSpPr>
+        <p:spPr>
+          <a:xfrm>
+            <a:off x="685800" y="6407017"/>
+            <a:ext cx="237744" cy="142646"/>
+          </a:xfrm>
+          <a:prstGeom prst="rect">
+            <a:avLst/>
+          </a:prstGeom>
+          <a:noFill/>
+        </p:spPr>
+        <p:txBody>
+          <a:bodyPr wrap="square" lIns="0" rIns="0" tIns="0" bIns="0" anchor="ctr">
+            <a:spAutoFit/>
+          </a:bodyPr>
+          <a:lstStyle/>
+          <a:p>
+            <a:pPr algn="ctr"/>
+            <a:r>
+              <a:rPr sz="1100" b="1">
+                <a:solidFill>
+                  <a:srgbClr val="18120E"/>
+                </a:solidFill>
+                <a:latin typeface="Calibri"/>
+              </a:rPr>
+              <a:t>!</a:t>
+            </a:r>
+          </a:p>
+        </p:txBody>
+      </p:sp>
+      <p:sp>
+        <p:nvSpPr>
+          <p:cNvPr id="87" name="TextBox 86"/>
+          <p:cNvSpPr txBox="1"/>
+          <p:nvPr/>
+        </p:nvSpPr>
+        <p:spPr>
+          <a:xfrm>
+            <a:off x="1069848" y="6309360"/>
+            <a:ext cx="9427464" cy="384048"/>
           </a:xfrm>
           <a:prstGeom prst="rect">
             <a:avLst/>
@@ -15676,14 +16168,14 @@
                 </a:solidFill>
                 <a:latin typeface="Calibri"/>
               </a:rPr>
-              <a:t>⚠ Пари 4/5 і 6/7 мають ідентичну ціну незалежно від ваги (45 г vs 60 г). Питома собівартість Takaokaya (₴1,59–2,12/г) у 1,4–2,1 раза вища за Mishima (₴0,99–1,80/г) — премія «Made in Japan».</a:t>
-            </a:r>
-          </a:p>
-        </p:txBody>
-      </p:sp>
-      <p:sp>
-        <p:nvSpPr>
-          <p:cNvPr id="86" name="TextBox 85"/>
+              <a:t>Пари 4/5 і 6/7 мають ідентичну ціну незалежно від ваги (45 г vs 60 г). Питома собівартість Takaokaya (₴1,59–2,12/г) у 1,4–2,1 раза вища за Mishima (₴0,99–1,80/г) — премія «Made in Japan».</a:t>
+            </a:r>
+          </a:p>
+        </p:txBody>
+      </p:sp>
+      <p:sp>
+        <p:nvSpPr>
+          <p:cNvPr id="88" name="TextBox 87"/>
           <p:cNvSpPr txBox="1"/>
           <p:nvPr/>
         </p:nvSpPr>
@@ -22503,7 +22995,7 @@
             <a:avLst/>
           </a:prstGeom>
           <a:solidFill>
-            <a:srgbClr val="B23924"/>
+            <a:srgbClr val="C72A1C"/>
           </a:solidFill>
           <a:ln>
             <a:noFill/>
@@ -22558,7 +23050,7 @@
             <a:r>
               <a:rPr sz="1050" b="1" spc="70">
                 <a:solidFill>
-                  <a:srgbClr val="B23924"/>
+                  <a:srgbClr val="C72A1C"/>
                 </a:solidFill>
                 <a:latin typeface="Calibri"/>
               </a:rPr>
@@ -22576,7 +23068,7 @@
         <p:spPr>
           <a:xfrm>
             <a:off x="502920" y="658368"/>
-            <a:ext cx="7178040" cy="1060704"/>
+            <a:ext cx="7178040" cy="1133856"/>
           </a:xfrm>
           <a:prstGeom prst="rect">
             <a:avLst/>
@@ -22595,11 +23087,11 @@
               </a:lnSpc>
             </a:pPr>
             <a:r>
-              <a:rPr sz="3400" b="1">
-                <a:solidFill>
-                  <a:srgbClr val="231C18"/>
-                </a:solidFill>
-                <a:latin typeface="Calibri"/>
+              <a:rPr sz="3600" b="1">
+                <a:solidFill>
+                  <a:srgbClr val="18120E"/>
+                </a:solidFill>
+                <a:latin typeface="Cambria"/>
               </a:rPr>
               <a:t>Dalian Mishima Foods</a:t>
             </a:r>
@@ -22611,11 +23103,11 @@
               </a:lnSpc>
             </a:pPr>
             <a:r>
-              <a:rPr sz="3400" b="1">
-                <a:solidFill>
-                  <a:srgbClr val="231C18"/>
-                </a:solidFill>
-                <a:latin typeface="Calibri"/>
+              <a:rPr sz="3600" b="1">
+                <a:solidFill>
+                  <a:srgbClr val="18120E"/>
+                </a:solidFill>
+                <a:latin typeface="Cambria"/>
               </a:rPr>
               <a:t>Co., Ltd.</a:t>
             </a:r>
@@ -22630,7 +23122,7 @@
         </p:nvSpPr>
         <p:spPr>
           <a:xfrm>
-            <a:off x="502920" y="1792224"/>
+            <a:off x="502920" y="1865376"/>
             <a:ext cx="7178040" cy="274320"/>
           </a:xfrm>
           <a:prstGeom prst="rect">
@@ -22648,7 +23140,7 @@
             <a:r>
               <a:rPr sz="1350" b="0">
                 <a:solidFill>
-                  <a:srgbClr val="B23924"/>
+                  <a:srgbClr val="C72A1C"/>
                 </a:solidFill>
                 <a:latin typeface="Calibri"/>
               </a:rPr>
@@ -22665,7 +23157,7 @@
         </p:nvSpPr>
         <p:spPr>
           <a:xfrm>
-            <a:off x="502920" y="2121408"/>
+            <a:off x="502920" y="2194560"/>
             <a:ext cx="1997049" cy="365760"/>
           </a:xfrm>
           <a:prstGeom prst="roundRect">
@@ -22674,7 +23166,7 @@
             </a:avLst>
           </a:prstGeom>
           <a:solidFill>
-            <a:srgbClr val="B23924"/>
+            <a:srgbClr val="C72A1C"/>
           </a:solidFill>
           <a:ln>
             <a:noFill/>
@@ -22711,7 +23203,7 @@
         </p:nvSpPr>
         <p:spPr>
           <a:xfrm>
-            <a:off x="502920" y="2121408"/>
+            <a:off x="502920" y="2194560"/>
             <a:ext cx="1997049" cy="365760"/>
           </a:xfrm>
           <a:prstGeom prst="rect">
@@ -22746,7 +23238,7 @@
         </p:nvSpPr>
         <p:spPr>
           <a:xfrm>
-            <a:off x="502920" y="2615184"/>
+            <a:off x="502920" y="2688336"/>
             <a:ext cx="7178040" cy="1252728"/>
           </a:xfrm>
           <a:prstGeom prst="roundRect">
@@ -22755,7 +23247,7 @@
             </a:avLst>
           </a:prstGeom>
           <a:solidFill>
-            <a:srgbClr val="231C18"/>
+            <a:srgbClr val="18120E"/>
           </a:solidFill>
           <a:ln>
             <a:noFill/>
@@ -22792,7 +23284,7 @@
         </p:nvSpPr>
         <p:spPr>
           <a:xfrm>
-            <a:off x="758952" y="2779776"/>
+            <a:off x="758952" y="2852928"/>
             <a:ext cx="6665975" cy="182880"/>
           </a:xfrm>
           <a:prstGeom prst="rect">
@@ -22810,7 +23302,7 @@
             <a:r>
               <a:rPr sz="950" b="1" spc="80">
                 <a:solidFill>
-                  <a:srgbClr val="E8A98D"/>
+                  <a:srgbClr val="C9A15A"/>
                 </a:solidFill>
                 <a:latin typeface="Calibri"/>
               </a:rPr>
@@ -22827,7 +23319,7 @@
         </p:nvSpPr>
         <p:spPr>
           <a:xfrm>
-            <a:off x="758952" y="3008376"/>
+            <a:off x="758952" y="3081528"/>
             <a:ext cx="6665975" cy="795528"/>
           </a:xfrm>
           <a:prstGeom prst="rect">
@@ -22930,7 +23422,7 @@
         </p:nvSpPr>
         <p:spPr>
           <a:xfrm>
-            <a:off x="502920" y="4050791"/>
+            <a:off x="502920" y="4123944"/>
             <a:ext cx="2301240" cy="365760"/>
           </a:xfrm>
           <a:prstGeom prst="rect">
@@ -22946,11 +23438,11 @@
           <a:p>
             <a:pPr algn="l"/>
             <a:r>
-              <a:rPr sz="2700" b="1">
-                <a:solidFill>
-                  <a:srgbClr val="B23924"/>
-                </a:solidFill>
-                <a:latin typeface="Calibri"/>
+              <a:rPr sz="2800" b="1">
+                <a:solidFill>
+                  <a:srgbClr val="C72A1C"/>
+                </a:solidFill>
+                <a:latin typeface="Cambria"/>
               </a:rPr>
               <a:t>8 SKU</a:t>
             </a:r>
@@ -22965,7 +23457,7 @@
         </p:nvSpPr>
         <p:spPr>
           <a:xfrm>
-            <a:off x="502920" y="4434840"/>
+            <a:off x="502920" y="4507992"/>
             <a:ext cx="2301240" cy="310896"/>
           </a:xfrm>
           <a:prstGeom prst="rect">
@@ -22987,7 +23479,7 @@
             <a:r>
               <a:rPr sz="830" b="0">
                 <a:solidFill>
-                  <a:srgbClr val="6E6760"/>
+                  <a:srgbClr val="6A5F56"/>
                 </a:solidFill>
                 <a:latin typeface="Calibri"/>
               </a:rPr>
@@ -23003,7 +23495,7 @@
             <a:r>
               <a:rPr sz="830" b="0">
                 <a:solidFill>
-                  <a:srgbClr val="6E6760"/>
+                  <a:srgbClr val="6A5F56"/>
                 </a:solidFill>
                 <a:latin typeface="Calibri"/>
               </a:rPr>
@@ -23020,7 +23512,7 @@
         </p:nvSpPr>
         <p:spPr>
           <a:xfrm>
-            <a:off x="2895600" y="4078224"/>
+            <a:off x="2895600" y="4151376"/>
             <a:ext cx="10058" cy="548640"/>
           </a:xfrm>
           <a:prstGeom prst="rect">
@@ -23064,7 +23556,7 @@
         </p:nvSpPr>
         <p:spPr>
           <a:xfrm>
-            <a:off x="3078480" y="4050791"/>
+            <a:off x="3078480" y="4123944"/>
             <a:ext cx="2118360" cy="365760"/>
           </a:xfrm>
           <a:prstGeom prst="rect">
@@ -23080,11 +23572,11 @@
           <a:p>
             <a:pPr algn="l"/>
             <a:r>
-              <a:rPr sz="2700" b="1">
-                <a:solidFill>
-                  <a:srgbClr val="B23924"/>
-                </a:solidFill>
-                <a:latin typeface="Calibri"/>
+              <a:rPr sz="2800" b="1">
+                <a:solidFill>
+                  <a:srgbClr val="C72A1C"/>
+                </a:solidFill>
+                <a:latin typeface="Cambria"/>
               </a:rPr>
               <a:t>17 м³</a:t>
             </a:r>
@@ -23099,7 +23591,7 @@
         </p:nvSpPr>
         <p:spPr>
           <a:xfrm>
-            <a:off x="3078480" y="4434840"/>
+            <a:off x="3078480" y="4507992"/>
             <a:ext cx="2118360" cy="310896"/>
           </a:xfrm>
           <a:prstGeom prst="rect">
@@ -23121,7 +23613,7 @@
             <a:r>
               <a:rPr sz="830" b="0">
                 <a:solidFill>
-                  <a:srgbClr val="6E6760"/>
+                  <a:srgbClr val="6A5F56"/>
                 </a:solidFill>
                 <a:latin typeface="Calibri"/>
               </a:rPr>
@@ -23137,7 +23629,7 @@
             <a:r>
               <a:rPr sz="830" b="0">
                 <a:solidFill>
-                  <a:srgbClr val="6E6760"/>
+                  <a:srgbClr val="6A5F56"/>
                 </a:solidFill>
                 <a:latin typeface="Calibri"/>
               </a:rPr>
@@ -23154,7 +23646,7 @@
         </p:nvSpPr>
         <p:spPr>
           <a:xfrm>
-            <a:off x="5288280" y="4078224"/>
+            <a:off x="5288280" y="4151376"/>
             <a:ext cx="10058" cy="548640"/>
           </a:xfrm>
           <a:prstGeom prst="rect">
@@ -23198,7 +23690,7 @@
         </p:nvSpPr>
         <p:spPr>
           <a:xfrm>
-            <a:off x="5471160" y="4050791"/>
+            <a:off x="5471160" y="4123944"/>
             <a:ext cx="2118360" cy="365760"/>
           </a:xfrm>
           <a:prstGeom prst="rect">
@@ -23214,11 +23706,11 @@
           <a:p>
             <a:pPr algn="l"/>
             <a:r>
-              <a:rPr sz="2700" b="1">
-                <a:solidFill>
-                  <a:srgbClr val="B23924"/>
-                </a:solidFill>
-                <a:latin typeface="Calibri"/>
+              <a:rPr sz="2800" b="1">
+                <a:solidFill>
+                  <a:srgbClr val="C72A1C"/>
+                </a:solidFill>
+                <a:latin typeface="Cambria"/>
               </a:rPr>
               <a:t>12 міс.</a:t>
             </a:r>
@@ -23233,7 +23725,7 @@
         </p:nvSpPr>
         <p:spPr>
           <a:xfrm>
-            <a:off x="5471160" y="4434840"/>
+            <a:off x="5471160" y="4507992"/>
             <a:ext cx="2118360" cy="310896"/>
           </a:xfrm>
           <a:prstGeom prst="rect">
@@ -23255,7 +23747,7 @@
             <a:r>
               <a:rPr sz="830" b="0">
                 <a:solidFill>
-                  <a:srgbClr val="6E6760"/>
+                  <a:srgbClr val="6A5F56"/>
                 </a:solidFill>
                 <a:latin typeface="Calibri"/>
               </a:rPr>
@@ -23271,7 +23763,7 @@
             <a:r>
               <a:rPr sz="830" b="0">
                 <a:solidFill>
-                  <a:srgbClr val="6E6760"/>
+                  <a:srgbClr val="6A5F56"/>
                 </a:solidFill>
                 <a:latin typeface="Calibri"/>
               </a:rPr>
@@ -23297,7 +23789,7 @@
             </a:avLst>
           </a:prstGeom>
           <a:solidFill>
-            <a:srgbClr val="231C18"/>
+            <a:srgbClr val="18120E"/>
           </a:solidFill>
           <a:ln>
             <a:noFill/>
@@ -23328,14 +23820,93 @@
       </p:sp>
       <p:sp>
         <p:nvSpPr>
-          <p:cNvPr id="22" name="TextBox 21"/>
-          <p:cNvSpPr txBox="1"/>
-          <p:nvPr/>
-        </p:nvSpPr>
-        <p:spPr>
-          <a:xfrm>
-            <a:off x="704088" y="5760720"/>
-            <a:ext cx="6400800" cy="457200"/>
+          <p:cNvPr id="22" name="Isosceles Triangle 21"/>
+          <p:cNvSpPr/>
+          <p:nvPr/>
+        </p:nvSpPr>
+        <p:spPr>
+          <a:xfrm>
+            <a:off x="685800" y="5852159"/>
+            <a:ext cx="237744" cy="213969"/>
+          </a:xfrm>
+          <a:prstGeom prst="triangle">
+            <a:avLst/>
+          </a:prstGeom>
+          <a:solidFill>
+            <a:srgbClr val="C9A15A"/>
+          </a:solidFill>
+          <a:ln>
+            <a:noFill/>
+          </a:ln>
+          <a:effectLst/>
+        </p:spPr>
+        <p:style>
+          <a:lnRef idx="1">
+            <a:schemeClr val="accent1"/>
+          </a:lnRef>
+          <a:fillRef idx="3">
+            <a:schemeClr val="accent1"/>
+          </a:fillRef>
+          <a:effectRef idx="2">
+            <a:schemeClr val="accent1"/>
+          </a:effectRef>
+          <a:fontRef idx="minor">
+            <a:schemeClr val="lt1"/>
+          </a:fontRef>
+        </p:style>
+        <p:txBody>
+          <a:bodyPr rtlCol="0" anchor="ctr"/>
+          <a:lstStyle/>
+          <a:p>
+            <a:pPr algn="ctr"/>
+          </a:p>
+        </p:txBody>
+      </p:sp>
+      <p:sp>
+        <p:nvSpPr>
+          <p:cNvPr id="23" name="TextBox 22"/>
+          <p:cNvSpPr txBox="1"/>
+          <p:nvPr/>
+        </p:nvSpPr>
+        <p:spPr>
+          <a:xfrm>
+            <a:off x="685800" y="5894953"/>
+            <a:ext cx="237744" cy="142646"/>
+          </a:xfrm>
+          <a:prstGeom prst="rect">
+            <a:avLst/>
+          </a:prstGeom>
+          <a:noFill/>
+        </p:spPr>
+        <p:txBody>
+          <a:bodyPr wrap="square" lIns="0" rIns="0" tIns="0" bIns="0" anchor="ctr">
+            <a:spAutoFit/>
+          </a:bodyPr>
+          <a:lstStyle/>
+          <a:p>
+            <a:pPr algn="ctr"/>
+            <a:r>
+              <a:rPr sz="1100" b="1">
+                <a:solidFill>
+                  <a:srgbClr val="18120E"/>
+                </a:solidFill>
+                <a:latin typeface="Calibri"/>
+              </a:rPr>
+              <a:t>!</a:t>
+            </a:r>
+          </a:p>
+        </p:txBody>
+      </p:sp>
+      <p:sp>
+        <p:nvSpPr>
+          <p:cNvPr id="24" name="TextBox 23"/>
+          <p:cNvSpPr txBox="1"/>
+          <p:nvPr/>
+        </p:nvSpPr>
+        <p:spPr>
+          <a:xfrm>
+            <a:off x="1069848" y="5760720"/>
+            <a:ext cx="5925312" cy="457200"/>
           </a:xfrm>
           <a:prstGeom prst="rect">
             <a:avLst/>
@@ -23360,14 +23931,14 @@
                 </a:solidFill>
                 <a:latin typeface="Calibri"/>
               </a:rPr>
-              <a:t>⚠ У файлі розрахунку базис доставки вказано «FOB Bangkok», хоча країна походження — Китай. Невідповідність потребує уточнення у постачальника до фіксації умов.</a:t>
-            </a:r>
-          </a:p>
-        </p:txBody>
-      </p:sp>
-      <p:sp>
-        <p:nvSpPr>
-          <p:cNvPr id="23" name="TextBox 22"/>
+              <a:t>У файлі розрахунку базис доставки вказано «FOB Bangkok», хоча країна походження — Китай. Невідповідність потребує уточнення у постачальника до фіксації умов.</a:t>
+            </a:r>
+          </a:p>
+        </p:txBody>
+      </p:sp>
+      <p:sp>
+        <p:nvSpPr>
+          <p:cNvPr id="25" name="TextBox 24"/>
           <p:cNvSpPr txBox="1"/>
           <p:nvPr/>
         </p:nvSpPr>
@@ -23477,7 +24048,7 @@
             <a:avLst/>
           </a:prstGeom>
           <a:solidFill>
-            <a:srgbClr val="B23924"/>
+            <a:srgbClr val="C72A1C"/>
           </a:solidFill>
           <a:ln>
             <a:noFill/>
@@ -23532,7 +24103,7 @@
             <a:r>
               <a:rPr sz="1050" b="1" spc="70">
                 <a:solidFill>
-                  <a:srgbClr val="B23924"/>
+                  <a:srgbClr val="C72A1C"/>
                 </a:solidFill>
                 <a:latin typeface="Calibri"/>
               </a:rPr>
@@ -23549,8 +24120,8 @@
         </p:nvSpPr>
         <p:spPr>
           <a:xfrm>
-            <a:off x="502920" y="548640"/>
-            <a:ext cx="6949440" cy="502920"/>
+            <a:off x="502920" y="530352"/>
+            <a:ext cx="6949440" cy="548640"/>
           </a:xfrm>
           <a:prstGeom prst="rect">
             <a:avLst/>
@@ -23565,11 +24136,11 @@
           <a:p>
             <a:pPr algn="l"/>
             <a:r>
-              <a:rPr sz="3000" b="1">
-                <a:solidFill>
-                  <a:srgbClr val="231C18"/>
-                </a:solidFill>
-                <a:latin typeface="Calibri"/>
+              <a:rPr sz="3200" b="1">
+                <a:solidFill>
+                  <a:srgbClr val="18120E"/>
+                </a:solidFill>
+                <a:latin typeface="Cambria"/>
               </a:rPr>
               <a:t>Furikake 25 г — собівартість</a:t>
             </a:r>
@@ -23593,7 +24164,7 @@
             </a:avLst>
           </a:prstGeom>
           <a:solidFill>
-            <a:srgbClr val="B23924"/>
+            <a:srgbClr val="C72A1C"/>
           </a:solidFill>
           <a:ln>
             <a:noFill/>
@@ -23672,7 +24243,7 @@
             <a:avLst/>
           </a:prstGeom>
           <a:solidFill>
-            <a:srgbClr val="B23924"/>
+            <a:srgbClr val="C72A1C"/>
           </a:solidFill>
           <a:ln>
             <a:noFill/>
@@ -23727,7 +24298,51 @@
       </p:pic>
       <p:sp>
         <p:nvSpPr>
-          <p:cNvPr id="10" name="Oval 9"/>
+          <p:cNvPr id="10" name="Rectangle 9"/>
+          <p:cNvSpPr/>
+          <p:nvPr/>
+        </p:nvSpPr>
+        <p:spPr>
+          <a:xfrm>
+            <a:off x="594360" y="1298448"/>
+            <a:ext cx="2462022" cy="1554480"/>
+          </a:xfrm>
+          <a:prstGeom prst="rect">
+            <a:avLst/>
+          </a:prstGeom>
+          <a:noFill/>
+          <a:ln w="12700">
+            <a:solidFill>
+              <a:srgbClr val="C9A15A"/>
+            </a:solidFill>
+          </a:ln>
+          <a:effectLst/>
+        </p:spPr>
+        <p:style>
+          <a:lnRef idx="1">
+            <a:schemeClr val="accent1"/>
+          </a:lnRef>
+          <a:fillRef idx="3">
+            <a:schemeClr val="accent1"/>
+          </a:fillRef>
+          <a:effectRef idx="2">
+            <a:schemeClr val="accent1"/>
+          </a:effectRef>
+          <a:fontRef idx="minor">
+            <a:schemeClr val="lt1"/>
+          </a:fontRef>
+        </p:style>
+        <p:txBody>
+          <a:bodyPr rtlCol="0" anchor="ctr"/>
+          <a:lstStyle/>
+          <a:p>
+            <a:pPr algn="ctr"/>
+          </a:p>
+        </p:txBody>
+      </p:sp>
+      <p:sp>
+        <p:nvSpPr>
+          <p:cNvPr id="11" name="Oval 10"/>
           <p:cNvSpPr/>
           <p:nvPr/>
         </p:nvSpPr>
@@ -23740,7 +24355,7 @@
             <a:avLst/>
           </a:prstGeom>
           <a:solidFill>
-            <a:srgbClr val="B23924"/>
+            <a:srgbClr val="C72A1C"/>
           </a:solidFill>
           <a:ln>
             <a:noFill/>
@@ -23771,7 +24386,7 @@
       </p:sp>
       <p:sp>
         <p:nvSpPr>
-          <p:cNvPr id="11" name="TextBox 10"/>
+          <p:cNvPr id="12" name="TextBox 11"/>
           <p:cNvSpPr txBox="1"/>
           <p:nvPr/>
         </p:nvSpPr>
@@ -23795,7 +24410,7 @@
             <a:r>
               <a:rPr sz="730" b="1" spc="70">
                 <a:solidFill>
-                  <a:srgbClr val="231C18"/>
+                  <a:srgbClr val="18120E"/>
                 </a:solidFill>
                 <a:latin typeface="Calibri"/>
               </a:rPr>
@@ -23806,7 +24421,7 @@
       </p:sp>
       <p:sp>
         <p:nvSpPr>
-          <p:cNvPr id="12" name="TextBox 11"/>
+          <p:cNvPr id="13" name="TextBox 12"/>
           <p:cNvSpPr txBox="1"/>
           <p:nvPr/>
         </p:nvSpPr>
@@ -23834,7 +24449,7 @@
             <a:r>
               <a:rPr sz="1400" b="1">
                 <a:solidFill>
-                  <a:srgbClr val="231C18"/>
+                  <a:srgbClr val="18120E"/>
                 </a:solidFill>
                 <a:latin typeface="Calibri"/>
               </a:rPr>
@@ -23845,7 +24460,7 @@
       </p:sp>
       <p:sp>
         <p:nvSpPr>
-          <p:cNvPr id="13" name="TextBox 12"/>
+          <p:cNvPr id="14" name="TextBox 13"/>
           <p:cNvSpPr txBox="1"/>
           <p:nvPr/>
         </p:nvSpPr>
@@ -23873,7 +24488,7 @@
             <a:r>
               <a:rPr sz="830" b="0">
                 <a:solidFill>
-                  <a:srgbClr val="6E6760"/>
+                  <a:srgbClr val="6A5F56"/>
                 </a:solidFill>
                 <a:latin typeface="Calibri"/>
               </a:rPr>
@@ -23884,7 +24499,7 @@
       </p:sp>
       <p:sp>
         <p:nvSpPr>
-          <p:cNvPr id="14" name="Rounded Rectangle 13"/>
+          <p:cNvPr id="15" name="Rounded Rectangle 14"/>
           <p:cNvSpPr/>
           <p:nvPr/>
         </p:nvSpPr>
@@ -23899,7 +24514,7 @@
             </a:avLst>
           </a:prstGeom>
           <a:solidFill>
-            <a:srgbClr val="231C18"/>
+            <a:srgbClr val="18120E"/>
           </a:solidFill>
           <a:ln>
             <a:noFill/>
@@ -23930,7 +24545,7 @@
       </p:sp>
       <p:sp>
         <p:nvSpPr>
-          <p:cNvPr id="15" name="TextBox 14"/>
+          <p:cNvPr id="16" name="TextBox 15"/>
           <p:cNvSpPr txBox="1"/>
           <p:nvPr/>
         </p:nvSpPr>
@@ -23954,7 +24569,7 @@
             <a:r>
               <a:rPr sz="630" b="1" spc="60">
                 <a:solidFill>
-                  <a:srgbClr val="E8A98D"/>
+                  <a:srgbClr val="C9A15A"/>
                 </a:solidFill>
                 <a:latin typeface="Calibri"/>
               </a:rPr>
@@ -23965,7 +24580,7 @@
       </p:sp>
       <p:sp>
         <p:nvSpPr>
-          <p:cNvPr id="16" name="TextBox 15"/>
+          <p:cNvPr id="17" name="TextBox 16"/>
           <p:cNvSpPr txBox="1"/>
           <p:nvPr/>
         </p:nvSpPr>
@@ -24000,7 +24615,7 @@
       </p:sp>
       <p:sp>
         <p:nvSpPr>
-          <p:cNvPr id="17" name="TextBox 16"/>
+          <p:cNvPr id="18" name="TextBox 17"/>
           <p:cNvSpPr txBox="1"/>
           <p:nvPr/>
         </p:nvSpPr>
@@ -24035,7 +24650,7 @@
       </p:sp>
       <p:sp>
         <p:nvSpPr>
-          <p:cNvPr id="18" name="Rectangle 17"/>
+          <p:cNvPr id="19" name="Rectangle 18"/>
           <p:cNvSpPr/>
           <p:nvPr/>
         </p:nvSpPr>
@@ -24079,7 +24694,7 @@
       </p:sp>
       <p:sp>
         <p:nvSpPr>
-          <p:cNvPr id="19" name="TextBox 18"/>
+          <p:cNvPr id="20" name="TextBox 19"/>
           <p:cNvSpPr txBox="1"/>
           <p:nvPr/>
         </p:nvSpPr>
@@ -24103,7 +24718,7 @@
             <a:r>
               <a:rPr sz="730" b="0">
                 <a:solidFill>
-                  <a:srgbClr val="6E6760"/>
+                  <a:srgbClr val="6A5F56"/>
                 </a:solidFill>
                 <a:latin typeface="Calibri"/>
               </a:rPr>
@@ -24114,7 +24729,7 @@
       </p:sp>
       <p:sp>
         <p:nvSpPr>
-          <p:cNvPr id="20" name="TextBox 19"/>
+          <p:cNvPr id="21" name="TextBox 20"/>
           <p:cNvSpPr txBox="1"/>
           <p:nvPr/>
         </p:nvSpPr>
@@ -24138,7 +24753,7 @@
             <a:r>
               <a:rPr sz="930" b="1">
                 <a:solidFill>
-                  <a:srgbClr val="231C18"/>
+                  <a:srgbClr val="18120E"/>
                 </a:solidFill>
                 <a:latin typeface="Calibri"/>
               </a:rPr>
@@ -24149,7 +24764,7 @@
       </p:sp>
       <p:sp>
         <p:nvSpPr>
-          <p:cNvPr id="21" name="Rectangle 20"/>
+          <p:cNvPr id="22" name="Rectangle 21"/>
           <p:cNvSpPr/>
           <p:nvPr/>
         </p:nvSpPr>
@@ -24193,7 +24808,7 @@
       </p:sp>
       <p:sp>
         <p:nvSpPr>
-          <p:cNvPr id="22" name="TextBox 21"/>
+          <p:cNvPr id="23" name="TextBox 22"/>
           <p:cNvSpPr txBox="1"/>
           <p:nvPr/>
         </p:nvSpPr>
@@ -24217,7 +24832,7 @@
             <a:r>
               <a:rPr sz="730" b="0">
                 <a:solidFill>
-                  <a:srgbClr val="6E6760"/>
+                  <a:srgbClr val="6A5F56"/>
                 </a:solidFill>
                 <a:latin typeface="Calibri"/>
               </a:rPr>
@@ -24228,7 +24843,7 @@
       </p:sp>
       <p:sp>
         <p:nvSpPr>
-          <p:cNvPr id="23" name="TextBox 22"/>
+          <p:cNvPr id="24" name="TextBox 23"/>
           <p:cNvSpPr txBox="1"/>
           <p:nvPr/>
         </p:nvSpPr>
@@ -24252,7 +24867,7 @@
             <a:r>
               <a:rPr sz="930" b="1">
                 <a:solidFill>
-                  <a:srgbClr val="231C18"/>
+                  <a:srgbClr val="18120E"/>
                 </a:solidFill>
                 <a:latin typeface="Calibri"/>
               </a:rPr>
@@ -24263,7 +24878,7 @@
       </p:sp>
       <p:sp>
         <p:nvSpPr>
-          <p:cNvPr id="24" name="Rectangle 23"/>
+          <p:cNvPr id="25" name="Rectangle 24"/>
           <p:cNvSpPr/>
           <p:nvPr/>
         </p:nvSpPr>
@@ -24276,7 +24891,7 @@
             <a:avLst/>
           </a:prstGeom>
           <a:solidFill>
-            <a:srgbClr val="B23924"/>
+            <a:srgbClr val="C72A1C"/>
           </a:solidFill>
           <a:ln>
             <a:noFill/>
@@ -24307,7 +24922,7 @@
       </p:sp>
       <p:pic>
         <p:nvPicPr>
-          <p:cNvPr id="25" name="Picture 24" descr="sku_ms_wasabi.png"/>
+          <p:cNvPr id="26" name="Picture 25" descr="sku_ms_wasabi.png"/>
           <p:cNvPicPr>
             <a:picLocks noChangeAspect="1"/>
           </p:cNvPicPr>
@@ -24331,7 +24946,51 @@
       </p:pic>
       <p:sp>
         <p:nvSpPr>
-          <p:cNvPr id="26" name="Rectangle 25"/>
+          <p:cNvPr id="27" name="Rectangle 26"/>
+          <p:cNvSpPr/>
+          <p:nvPr/>
+        </p:nvSpPr>
+        <p:spPr>
+          <a:xfrm>
+            <a:off x="3440430" y="1298448"/>
+            <a:ext cx="2462022" cy="1554480"/>
+          </a:xfrm>
+          <a:prstGeom prst="rect">
+            <a:avLst/>
+          </a:prstGeom>
+          <a:noFill/>
+          <a:ln w="12700">
+            <a:solidFill>
+              <a:srgbClr val="C9A15A"/>
+            </a:solidFill>
+          </a:ln>
+          <a:effectLst/>
+        </p:spPr>
+        <p:style>
+          <a:lnRef idx="1">
+            <a:schemeClr val="accent1"/>
+          </a:lnRef>
+          <a:fillRef idx="3">
+            <a:schemeClr val="accent1"/>
+          </a:fillRef>
+          <a:effectRef idx="2">
+            <a:schemeClr val="accent1"/>
+          </a:effectRef>
+          <a:fontRef idx="minor">
+            <a:schemeClr val="lt1"/>
+          </a:fontRef>
+        </p:style>
+        <p:txBody>
+          <a:bodyPr rtlCol="0" anchor="ctr"/>
+          <a:lstStyle/>
+          <a:p>
+            <a:pPr algn="ctr"/>
+          </a:p>
+        </p:txBody>
+      </p:sp>
+      <p:sp>
+        <p:nvSpPr>
+          <p:cNvPr id="28" name="Rectangle 27"/>
           <p:cNvSpPr/>
           <p:nvPr/>
         </p:nvSpPr>
@@ -24344,7 +25003,7 @@
             <a:avLst/>
           </a:prstGeom>
           <a:solidFill>
-            <a:srgbClr val="8F2A19"/>
+            <a:srgbClr val="8A1C12"/>
           </a:solidFill>
           <a:ln>
             <a:noFill/>
@@ -24375,7 +25034,7 @@
       </p:sp>
       <p:sp>
         <p:nvSpPr>
-          <p:cNvPr id="27" name="TextBox 26"/>
+          <p:cNvPr id="29" name="TextBox 28"/>
           <p:cNvSpPr txBox="1"/>
           <p:nvPr/>
         </p:nvSpPr>
@@ -24410,7 +25069,7 @@
       </p:sp>
       <p:sp>
         <p:nvSpPr>
-          <p:cNvPr id="28" name="Oval 27"/>
+          <p:cNvPr id="30" name="Oval 29"/>
           <p:cNvSpPr/>
           <p:nvPr/>
         </p:nvSpPr>
@@ -24423,7 +25082,7 @@
             <a:avLst/>
           </a:prstGeom>
           <a:solidFill>
-            <a:srgbClr val="B23924"/>
+            <a:srgbClr val="C72A1C"/>
           </a:solidFill>
           <a:ln>
             <a:noFill/>
@@ -24454,7 +25113,7 @@
       </p:sp>
       <p:sp>
         <p:nvSpPr>
-          <p:cNvPr id="29" name="TextBox 28"/>
+          <p:cNvPr id="31" name="TextBox 30"/>
           <p:cNvSpPr txBox="1"/>
           <p:nvPr/>
         </p:nvSpPr>
@@ -24478,7 +25137,7 @@
             <a:r>
               <a:rPr sz="730" b="1" spc="70">
                 <a:solidFill>
-                  <a:srgbClr val="231C18"/>
+                  <a:srgbClr val="18120E"/>
                 </a:solidFill>
                 <a:latin typeface="Calibri"/>
               </a:rPr>
@@ -24489,7 +25148,7 @@
       </p:sp>
       <p:sp>
         <p:nvSpPr>
-          <p:cNvPr id="30" name="TextBox 29"/>
+          <p:cNvPr id="32" name="TextBox 31"/>
           <p:cNvSpPr txBox="1"/>
           <p:nvPr/>
         </p:nvSpPr>
@@ -24517,7 +25176,7 @@
             <a:r>
               <a:rPr sz="1400" b="1">
                 <a:solidFill>
-                  <a:srgbClr val="231C18"/>
+                  <a:srgbClr val="18120E"/>
                 </a:solidFill>
                 <a:latin typeface="Calibri"/>
               </a:rPr>
@@ -24528,7 +25187,7 @@
       </p:sp>
       <p:sp>
         <p:nvSpPr>
-          <p:cNvPr id="31" name="TextBox 30"/>
+          <p:cNvPr id="33" name="TextBox 32"/>
           <p:cNvSpPr txBox="1"/>
           <p:nvPr/>
         </p:nvSpPr>
@@ -24556,7 +25215,7 @@
             <a:r>
               <a:rPr sz="830" b="0">
                 <a:solidFill>
-                  <a:srgbClr val="6E6760"/>
+                  <a:srgbClr val="6A5F56"/>
                 </a:solidFill>
                 <a:latin typeface="Calibri"/>
               </a:rPr>
@@ -24567,7 +25226,7 @@
       </p:sp>
       <p:sp>
         <p:nvSpPr>
-          <p:cNvPr id="32" name="Rounded Rectangle 31"/>
+          <p:cNvPr id="34" name="Rounded Rectangle 33"/>
           <p:cNvSpPr/>
           <p:nvPr/>
         </p:nvSpPr>
@@ -24582,7 +25241,7 @@
             </a:avLst>
           </a:prstGeom>
           <a:solidFill>
-            <a:srgbClr val="231C18"/>
+            <a:srgbClr val="18120E"/>
           </a:solidFill>
           <a:ln>
             <a:noFill/>
@@ -24613,7 +25272,7 @@
       </p:sp>
       <p:sp>
         <p:nvSpPr>
-          <p:cNvPr id="33" name="TextBox 32"/>
+          <p:cNvPr id="35" name="TextBox 34"/>
           <p:cNvSpPr txBox="1"/>
           <p:nvPr/>
         </p:nvSpPr>
@@ -24637,7 +25296,7 @@
             <a:r>
               <a:rPr sz="630" b="1" spc="60">
                 <a:solidFill>
-                  <a:srgbClr val="E8A98D"/>
+                  <a:srgbClr val="C9A15A"/>
                 </a:solidFill>
                 <a:latin typeface="Calibri"/>
               </a:rPr>
@@ -24648,7 +25307,7 @@
       </p:sp>
       <p:sp>
         <p:nvSpPr>
-          <p:cNvPr id="34" name="TextBox 33"/>
+          <p:cNvPr id="36" name="TextBox 35"/>
           <p:cNvSpPr txBox="1"/>
           <p:nvPr/>
         </p:nvSpPr>
@@ -24683,7 +25342,7 @@
       </p:sp>
       <p:sp>
         <p:nvSpPr>
-          <p:cNvPr id="35" name="TextBox 34"/>
+          <p:cNvPr id="37" name="TextBox 36"/>
           <p:cNvSpPr txBox="1"/>
           <p:nvPr/>
         </p:nvSpPr>
@@ -24718,7 +25377,7 @@
       </p:sp>
       <p:sp>
         <p:nvSpPr>
-          <p:cNvPr id="36" name="Rectangle 35"/>
+          <p:cNvPr id="38" name="Rectangle 37"/>
           <p:cNvSpPr/>
           <p:nvPr/>
         </p:nvSpPr>
@@ -24762,7 +25421,7 @@
       </p:sp>
       <p:sp>
         <p:nvSpPr>
-          <p:cNvPr id="37" name="TextBox 36"/>
+          <p:cNvPr id="39" name="TextBox 38"/>
           <p:cNvSpPr txBox="1"/>
           <p:nvPr/>
         </p:nvSpPr>
@@ -24786,7 +25445,7 @@
             <a:r>
               <a:rPr sz="730" b="0">
                 <a:solidFill>
-                  <a:srgbClr val="6E6760"/>
+                  <a:srgbClr val="6A5F56"/>
                 </a:solidFill>
                 <a:latin typeface="Calibri"/>
               </a:rPr>
@@ -24797,7 +25456,7 @@
       </p:sp>
       <p:sp>
         <p:nvSpPr>
-          <p:cNvPr id="38" name="TextBox 37"/>
+          <p:cNvPr id="40" name="TextBox 39"/>
           <p:cNvSpPr txBox="1"/>
           <p:nvPr/>
         </p:nvSpPr>
@@ -24821,7 +25480,7 @@
             <a:r>
               <a:rPr sz="930" b="1">
                 <a:solidFill>
-                  <a:srgbClr val="231C18"/>
+                  <a:srgbClr val="18120E"/>
                 </a:solidFill>
                 <a:latin typeface="Calibri"/>
               </a:rPr>
@@ -24832,7 +25491,7 @@
       </p:sp>
       <p:sp>
         <p:nvSpPr>
-          <p:cNvPr id="39" name="Rectangle 38"/>
+          <p:cNvPr id="41" name="Rectangle 40"/>
           <p:cNvSpPr/>
           <p:nvPr/>
         </p:nvSpPr>
@@ -24876,7 +25535,7 @@
       </p:sp>
       <p:sp>
         <p:nvSpPr>
-          <p:cNvPr id="40" name="TextBox 39"/>
+          <p:cNvPr id="42" name="TextBox 41"/>
           <p:cNvSpPr txBox="1"/>
           <p:nvPr/>
         </p:nvSpPr>
@@ -24900,7 +25559,7 @@
             <a:r>
               <a:rPr sz="730" b="0">
                 <a:solidFill>
-                  <a:srgbClr val="6E6760"/>
+                  <a:srgbClr val="6A5F56"/>
                 </a:solidFill>
                 <a:latin typeface="Calibri"/>
               </a:rPr>
@@ -24911,7 +25570,7 @@
       </p:sp>
       <p:sp>
         <p:nvSpPr>
-          <p:cNvPr id="41" name="TextBox 40"/>
+          <p:cNvPr id="43" name="TextBox 42"/>
           <p:cNvSpPr txBox="1"/>
           <p:nvPr/>
         </p:nvSpPr>
@@ -24935,7 +25594,7 @@
             <a:r>
               <a:rPr sz="930" b="1">
                 <a:solidFill>
-                  <a:srgbClr val="231C18"/>
+                  <a:srgbClr val="18120E"/>
                 </a:solidFill>
                 <a:latin typeface="Calibri"/>
               </a:rPr>
@@ -24946,7 +25605,7 @@
       </p:sp>
       <p:sp>
         <p:nvSpPr>
-          <p:cNvPr id="42" name="Rectangle 41"/>
+          <p:cNvPr id="44" name="Rectangle 43"/>
           <p:cNvSpPr/>
           <p:nvPr/>
         </p:nvSpPr>
@@ -24959,7 +25618,7 @@
             <a:avLst/>
           </a:prstGeom>
           <a:solidFill>
-            <a:srgbClr val="B23924"/>
+            <a:srgbClr val="2A211B"/>
           </a:solidFill>
           <a:ln>
             <a:noFill/>
@@ -24990,7 +25649,7 @@
       </p:sp>
       <p:sp>
         <p:nvSpPr>
-          <p:cNvPr id="43" name="Rounded Rectangle 42"/>
+          <p:cNvPr id="45" name="Rounded Rectangle 44"/>
           <p:cNvSpPr/>
           <p:nvPr/>
         </p:nvSpPr>
@@ -25007,7 +25666,7 @@
           <a:noFill/>
           <a:ln w="19050">
             <a:solidFill>
-              <a:srgbClr val="F3EADF"/>
+              <a:srgbClr val="C9A15A"/>
             </a:solidFill>
           </a:ln>
           <a:effectLst/>
@@ -25036,7 +25695,7 @@
       </p:sp>
       <p:sp>
         <p:nvSpPr>
-          <p:cNvPr id="44" name="Rounded Rectangle 43"/>
+          <p:cNvPr id="46" name="Rounded Rectangle 45"/>
           <p:cNvSpPr/>
           <p:nvPr/>
         </p:nvSpPr>
@@ -25053,7 +25712,7 @@
           <a:noFill/>
           <a:ln w="19050">
             <a:solidFill>
-              <a:srgbClr val="F3EADF"/>
+              <a:srgbClr val="C9A15A"/>
             </a:solidFill>
           </a:ln>
           <a:effectLst/>
@@ -25082,7 +25741,7 @@
       </p:sp>
       <p:sp>
         <p:nvSpPr>
-          <p:cNvPr id="45" name="Oval 44"/>
+          <p:cNvPr id="47" name="Oval 46"/>
           <p:cNvSpPr/>
           <p:nvPr/>
         </p:nvSpPr>
@@ -25097,7 +25756,7 @@
           <a:noFill/>
           <a:ln w="19050">
             <a:solidFill>
-              <a:srgbClr val="F3EADF"/>
+              <a:srgbClr val="C9A15A"/>
             </a:solidFill>
           </a:ln>
           <a:effectLst/>
@@ -25126,7 +25785,7 @@
       </p:sp>
       <p:sp>
         <p:nvSpPr>
-          <p:cNvPr id="46" name="TextBox 45"/>
+          <p:cNvPr id="48" name="TextBox 47"/>
           <p:cNvSpPr txBox="1"/>
           <p:nvPr/>
         </p:nvSpPr>
@@ -25150,7 +25809,7 @@
             <a:r>
               <a:rPr sz="950" b="1" spc="100">
                 <a:solidFill>
-                  <a:srgbClr val="F3EADF"/>
+                  <a:srgbClr val="C9A15A"/>
                 </a:solidFill>
                 <a:latin typeface="Calibri"/>
               </a:rPr>
@@ -25161,7 +25820,7 @@
       </p:sp>
       <p:sp>
         <p:nvSpPr>
-          <p:cNvPr id="47" name="Oval 46"/>
+          <p:cNvPr id="49" name="Oval 48"/>
           <p:cNvSpPr/>
           <p:nvPr/>
         </p:nvSpPr>
@@ -25174,7 +25833,7 @@
             <a:avLst/>
           </a:prstGeom>
           <a:solidFill>
-            <a:srgbClr val="B23924"/>
+            <a:srgbClr val="C72A1C"/>
           </a:solidFill>
           <a:ln>
             <a:noFill/>
@@ -25205,7 +25864,7 @@
       </p:sp>
       <p:sp>
         <p:nvSpPr>
-          <p:cNvPr id="48" name="TextBox 47"/>
+          <p:cNvPr id="50" name="TextBox 49"/>
           <p:cNvSpPr txBox="1"/>
           <p:nvPr/>
         </p:nvSpPr>
@@ -25229,7 +25888,7 @@
             <a:r>
               <a:rPr sz="730" b="1" spc="70">
                 <a:solidFill>
-                  <a:srgbClr val="231C18"/>
+                  <a:srgbClr val="18120E"/>
                 </a:solidFill>
                 <a:latin typeface="Calibri"/>
               </a:rPr>
@@ -25240,7 +25899,7 @@
       </p:sp>
       <p:sp>
         <p:nvSpPr>
-          <p:cNvPr id="49" name="TextBox 48"/>
+          <p:cNvPr id="51" name="TextBox 50"/>
           <p:cNvSpPr txBox="1"/>
           <p:nvPr/>
         </p:nvSpPr>
@@ -25268,7 +25927,7 @@
             <a:r>
               <a:rPr sz="1400" b="1">
                 <a:solidFill>
-                  <a:srgbClr val="231C18"/>
+                  <a:srgbClr val="18120E"/>
                 </a:solidFill>
                 <a:latin typeface="Calibri"/>
               </a:rPr>
@@ -25279,7 +25938,7 @@
       </p:sp>
       <p:sp>
         <p:nvSpPr>
-          <p:cNvPr id="50" name="TextBox 49"/>
+          <p:cNvPr id="52" name="TextBox 51"/>
           <p:cNvSpPr txBox="1"/>
           <p:nvPr/>
         </p:nvSpPr>
@@ -25307,7 +25966,7 @@
             <a:r>
               <a:rPr sz="830" b="0">
                 <a:solidFill>
-                  <a:srgbClr val="6E6760"/>
+                  <a:srgbClr val="6A5F56"/>
                 </a:solidFill>
                 <a:latin typeface="Calibri"/>
               </a:rPr>
@@ -25318,7 +25977,7 @@
       </p:sp>
       <p:sp>
         <p:nvSpPr>
-          <p:cNvPr id="51" name="Rounded Rectangle 50"/>
+          <p:cNvPr id="53" name="Rounded Rectangle 52"/>
           <p:cNvSpPr/>
           <p:nvPr/>
         </p:nvSpPr>
@@ -25333,7 +25992,7 @@
             </a:avLst>
           </a:prstGeom>
           <a:solidFill>
-            <a:srgbClr val="231C18"/>
+            <a:srgbClr val="18120E"/>
           </a:solidFill>
           <a:ln>
             <a:noFill/>
@@ -25364,7 +26023,7 @@
       </p:sp>
       <p:sp>
         <p:nvSpPr>
-          <p:cNvPr id="52" name="TextBox 51"/>
+          <p:cNvPr id="54" name="TextBox 53"/>
           <p:cNvSpPr txBox="1"/>
           <p:nvPr/>
         </p:nvSpPr>
@@ -25388,7 +26047,7 @@
             <a:r>
               <a:rPr sz="630" b="1" spc="60">
                 <a:solidFill>
-                  <a:srgbClr val="E8A98D"/>
+                  <a:srgbClr val="C9A15A"/>
                 </a:solidFill>
                 <a:latin typeface="Calibri"/>
               </a:rPr>
@@ -25399,7 +26058,7 @@
       </p:sp>
       <p:sp>
         <p:nvSpPr>
-          <p:cNvPr id="53" name="TextBox 52"/>
+          <p:cNvPr id="55" name="TextBox 54"/>
           <p:cNvSpPr txBox="1"/>
           <p:nvPr/>
         </p:nvSpPr>
@@ -25434,7 +26093,7 @@
       </p:sp>
       <p:sp>
         <p:nvSpPr>
-          <p:cNvPr id="54" name="TextBox 53"/>
+          <p:cNvPr id="56" name="TextBox 55"/>
           <p:cNvSpPr txBox="1"/>
           <p:nvPr/>
         </p:nvSpPr>
@@ -25469,7 +26128,7 @@
       </p:sp>
       <p:sp>
         <p:nvSpPr>
-          <p:cNvPr id="55" name="Rectangle 54"/>
+          <p:cNvPr id="57" name="Rectangle 56"/>
           <p:cNvSpPr/>
           <p:nvPr/>
         </p:nvSpPr>
@@ -25513,7 +26172,7 @@
       </p:sp>
       <p:sp>
         <p:nvSpPr>
-          <p:cNvPr id="56" name="TextBox 55"/>
+          <p:cNvPr id="58" name="TextBox 57"/>
           <p:cNvSpPr txBox="1"/>
           <p:nvPr/>
         </p:nvSpPr>
@@ -25537,7 +26196,7 @@
             <a:r>
               <a:rPr sz="730" b="0">
                 <a:solidFill>
-                  <a:srgbClr val="6E6760"/>
+                  <a:srgbClr val="6A5F56"/>
                 </a:solidFill>
                 <a:latin typeface="Calibri"/>
               </a:rPr>
@@ -25548,7 +26207,7 @@
       </p:sp>
       <p:sp>
         <p:nvSpPr>
-          <p:cNvPr id="57" name="TextBox 56"/>
+          <p:cNvPr id="59" name="TextBox 58"/>
           <p:cNvSpPr txBox="1"/>
           <p:nvPr/>
         </p:nvSpPr>
@@ -25572,7 +26231,7 @@
             <a:r>
               <a:rPr sz="930" b="1">
                 <a:solidFill>
-                  <a:srgbClr val="231C18"/>
+                  <a:srgbClr val="18120E"/>
                 </a:solidFill>
                 <a:latin typeface="Calibri"/>
               </a:rPr>
@@ -25583,7 +26242,7 @@
       </p:sp>
       <p:sp>
         <p:nvSpPr>
-          <p:cNvPr id="58" name="Rectangle 57"/>
+          <p:cNvPr id="60" name="Rectangle 59"/>
           <p:cNvSpPr/>
           <p:nvPr/>
         </p:nvSpPr>
@@ -25627,7 +26286,7 @@
       </p:sp>
       <p:sp>
         <p:nvSpPr>
-          <p:cNvPr id="59" name="TextBox 58"/>
+          <p:cNvPr id="61" name="TextBox 60"/>
           <p:cNvSpPr txBox="1"/>
           <p:nvPr/>
         </p:nvSpPr>
@@ -25651,7 +26310,7 @@
             <a:r>
               <a:rPr sz="730" b="0">
                 <a:solidFill>
-                  <a:srgbClr val="6E6760"/>
+                  <a:srgbClr val="6A5F56"/>
                 </a:solidFill>
                 <a:latin typeface="Calibri"/>
               </a:rPr>
@@ -25662,7 +26321,7 @@
       </p:sp>
       <p:sp>
         <p:nvSpPr>
-          <p:cNvPr id="60" name="TextBox 59"/>
+          <p:cNvPr id="62" name="TextBox 61"/>
           <p:cNvSpPr txBox="1"/>
           <p:nvPr/>
         </p:nvSpPr>
@@ -25686,7 +26345,7 @@
             <a:r>
               <a:rPr sz="930" b="1">
                 <a:solidFill>
-                  <a:srgbClr val="231C18"/>
+                  <a:srgbClr val="18120E"/>
                 </a:solidFill>
                 <a:latin typeface="Calibri"/>
               </a:rPr>
@@ -25697,7 +26356,7 @@
       </p:sp>
       <p:sp>
         <p:nvSpPr>
-          <p:cNvPr id="61" name="Rectangle 60"/>
+          <p:cNvPr id="63" name="Rectangle 62"/>
           <p:cNvSpPr/>
           <p:nvPr/>
         </p:nvSpPr>
@@ -25710,7 +26369,7 @@
             <a:avLst/>
           </a:prstGeom>
           <a:solidFill>
-            <a:srgbClr val="B23924"/>
+            <a:srgbClr val="C72A1C"/>
           </a:solidFill>
           <a:ln>
             <a:noFill/>
@@ -25741,7 +26400,7 @@
       </p:sp>
       <p:pic>
         <p:nvPicPr>
-          <p:cNvPr id="62" name="Picture 61" descr="sku_ms_nori.png"/>
+          <p:cNvPr id="64" name="Picture 63" descr="sku_ms_nori.png"/>
           <p:cNvPicPr>
             <a:picLocks noChangeAspect="1"/>
           </p:cNvPicPr>
@@ -25765,7 +26424,51 @@
       </p:pic>
       <p:sp>
         <p:nvSpPr>
-          <p:cNvPr id="63" name="Oval 62"/>
+          <p:cNvPr id="65" name="Rectangle 64"/>
+          <p:cNvSpPr/>
+          <p:nvPr/>
+        </p:nvSpPr>
+        <p:spPr>
+          <a:xfrm>
+            <a:off x="9132570" y="1298448"/>
+            <a:ext cx="2462022" cy="1554480"/>
+          </a:xfrm>
+          <a:prstGeom prst="rect">
+            <a:avLst/>
+          </a:prstGeom>
+          <a:noFill/>
+          <a:ln w="12700">
+            <a:solidFill>
+              <a:srgbClr val="C9A15A"/>
+            </a:solidFill>
+          </a:ln>
+          <a:effectLst/>
+        </p:spPr>
+        <p:style>
+          <a:lnRef idx="1">
+            <a:schemeClr val="accent1"/>
+          </a:lnRef>
+          <a:fillRef idx="3">
+            <a:schemeClr val="accent1"/>
+          </a:fillRef>
+          <a:effectRef idx="2">
+            <a:schemeClr val="accent1"/>
+          </a:effectRef>
+          <a:fontRef idx="minor">
+            <a:schemeClr val="lt1"/>
+          </a:fontRef>
+        </p:style>
+        <p:txBody>
+          <a:bodyPr rtlCol="0" anchor="ctr"/>
+          <a:lstStyle/>
+          <a:p>
+            <a:pPr algn="ctr"/>
+          </a:p>
+        </p:txBody>
+      </p:sp>
+      <p:sp>
+        <p:nvSpPr>
+          <p:cNvPr id="66" name="Oval 65"/>
           <p:cNvSpPr/>
           <p:nvPr/>
         </p:nvSpPr>
@@ -25778,7 +26481,7 @@
             <a:avLst/>
           </a:prstGeom>
           <a:solidFill>
-            <a:srgbClr val="B23924"/>
+            <a:srgbClr val="C72A1C"/>
           </a:solidFill>
           <a:ln>
             <a:noFill/>
@@ -25809,7 +26512,7 @@
       </p:sp>
       <p:sp>
         <p:nvSpPr>
-          <p:cNvPr id="64" name="TextBox 63"/>
+          <p:cNvPr id="67" name="TextBox 66"/>
           <p:cNvSpPr txBox="1"/>
           <p:nvPr/>
         </p:nvSpPr>
@@ -25833,7 +26536,7 @@
             <a:r>
               <a:rPr sz="730" b="1" spc="70">
                 <a:solidFill>
-                  <a:srgbClr val="231C18"/>
+                  <a:srgbClr val="18120E"/>
                 </a:solidFill>
                 <a:latin typeface="Calibri"/>
               </a:rPr>
@@ -25844,7 +26547,7 @@
       </p:sp>
       <p:sp>
         <p:nvSpPr>
-          <p:cNvPr id="65" name="TextBox 64"/>
+          <p:cNvPr id="68" name="TextBox 67"/>
           <p:cNvSpPr txBox="1"/>
           <p:nvPr/>
         </p:nvSpPr>
@@ -25872,7 +26575,7 @@
             <a:r>
               <a:rPr sz="1400" b="1">
                 <a:solidFill>
-                  <a:srgbClr val="231C18"/>
+                  <a:srgbClr val="18120E"/>
                 </a:solidFill>
                 <a:latin typeface="Calibri"/>
               </a:rPr>
@@ -25883,7 +26586,7 @@
       </p:sp>
       <p:sp>
         <p:nvSpPr>
-          <p:cNvPr id="66" name="TextBox 65"/>
+          <p:cNvPr id="69" name="TextBox 68"/>
           <p:cNvSpPr txBox="1"/>
           <p:nvPr/>
         </p:nvSpPr>
@@ -25911,7 +26614,7 @@
             <a:r>
               <a:rPr sz="830" b="0">
                 <a:solidFill>
-                  <a:srgbClr val="6E6760"/>
+                  <a:srgbClr val="6A5F56"/>
                 </a:solidFill>
                 <a:latin typeface="Calibri"/>
               </a:rPr>
@@ -25922,7 +26625,7 @@
       </p:sp>
       <p:sp>
         <p:nvSpPr>
-          <p:cNvPr id="67" name="Rounded Rectangle 66"/>
+          <p:cNvPr id="70" name="Rounded Rectangle 69"/>
           <p:cNvSpPr/>
           <p:nvPr/>
         </p:nvSpPr>
@@ -25937,7 +26640,7 @@
             </a:avLst>
           </a:prstGeom>
           <a:solidFill>
-            <a:srgbClr val="231C18"/>
+            <a:srgbClr val="18120E"/>
           </a:solidFill>
           <a:ln>
             <a:noFill/>
@@ -25968,7 +26671,7 @@
       </p:sp>
       <p:sp>
         <p:nvSpPr>
-          <p:cNvPr id="68" name="TextBox 67"/>
+          <p:cNvPr id="71" name="TextBox 70"/>
           <p:cNvSpPr txBox="1"/>
           <p:nvPr/>
         </p:nvSpPr>
@@ -25992,7 +26695,7 @@
             <a:r>
               <a:rPr sz="630" b="1" spc="60">
                 <a:solidFill>
-                  <a:srgbClr val="E8A98D"/>
+                  <a:srgbClr val="C9A15A"/>
                 </a:solidFill>
                 <a:latin typeface="Calibri"/>
               </a:rPr>
@@ -26003,7 +26706,7 @@
       </p:sp>
       <p:sp>
         <p:nvSpPr>
-          <p:cNvPr id="69" name="TextBox 68"/>
+          <p:cNvPr id="72" name="TextBox 71"/>
           <p:cNvSpPr txBox="1"/>
           <p:nvPr/>
         </p:nvSpPr>
@@ -26038,7 +26741,7 @@
       </p:sp>
       <p:sp>
         <p:nvSpPr>
-          <p:cNvPr id="70" name="TextBox 69"/>
+          <p:cNvPr id="73" name="TextBox 72"/>
           <p:cNvSpPr txBox="1"/>
           <p:nvPr/>
         </p:nvSpPr>
@@ -26073,7 +26776,7 @@
       </p:sp>
       <p:sp>
         <p:nvSpPr>
-          <p:cNvPr id="71" name="Rectangle 70"/>
+          <p:cNvPr id="74" name="Rectangle 73"/>
           <p:cNvSpPr/>
           <p:nvPr/>
         </p:nvSpPr>
@@ -26117,7 +26820,7 @@
       </p:sp>
       <p:sp>
         <p:nvSpPr>
-          <p:cNvPr id="72" name="TextBox 71"/>
+          <p:cNvPr id="75" name="TextBox 74"/>
           <p:cNvSpPr txBox="1"/>
           <p:nvPr/>
         </p:nvSpPr>
@@ -26141,7 +26844,7 @@
             <a:r>
               <a:rPr sz="730" b="0">
                 <a:solidFill>
-                  <a:srgbClr val="6E6760"/>
+                  <a:srgbClr val="6A5F56"/>
                 </a:solidFill>
                 <a:latin typeface="Calibri"/>
               </a:rPr>
@@ -26152,7 +26855,7 @@
       </p:sp>
       <p:sp>
         <p:nvSpPr>
-          <p:cNvPr id="73" name="TextBox 72"/>
+          <p:cNvPr id="76" name="TextBox 75"/>
           <p:cNvSpPr txBox="1"/>
           <p:nvPr/>
         </p:nvSpPr>
@@ -26176,7 +26879,7 @@
             <a:r>
               <a:rPr sz="930" b="1">
                 <a:solidFill>
-                  <a:srgbClr val="231C18"/>
+                  <a:srgbClr val="18120E"/>
                 </a:solidFill>
                 <a:latin typeface="Calibri"/>
               </a:rPr>
@@ -26187,7 +26890,7 @@
       </p:sp>
       <p:sp>
         <p:nvSpPr>
-          <p:cNvPr id="74" name="Rectangle 73"/>
+          <p:cNvPr id="77" name="Rectangle 76"/>
           <p:cNvSpPr/>
           <p:nvPr/>
         </p:nvSpPr>
@@ -26231,7 +26934,7 @@
       </p:sp>
       <p:sp>
         <p:nvSpPr>
-          <p:cNvPr id="75" name="TextBox 74"/>
+          <p:cNvPr id="78" name="TextBox 77"/>
           <p:cNvSpPr txBox="1"/>
           <p:nvPr/>
         </p:nvSpPr>
@@ -26255,7 +26958,7 @@
             <a:r>
               <a:rPr sz="730" b="0">
                 <a:solidFill>
-                  <a:srgbClr val="6E6760"/>
+                  <a:srgbClr val="6A5F56"/>
                 </a:solidFill>
                 <a:latin typeface="Calibri"/>
               </a:rPr>
@@ -26266,7 +26969,7 @@
       </p:sp>
       <p:sp>
         <p:nvSpPr>
-          <p:cNvPr id="76" name="TextBox 75"/>
+          <p:cNvPr id="79" name="TextBox 78"/>
           <p:cNvSpPr txBox="1"/>
           <p:nvPr/>
         </p:nvSpPr>
@@ -26290,7 +26993,7 @@
             <a:r>
               <a:rPr sz="930" b="1">
                 <a:solidFill>
-                  <a:srgbClr val="231C18"/>
+                  <a:srgbClr val="18120E"/>
                 </a:solidFill>
                 <a:latin typeface="Calibri"/>
               </a:rPr>
@@ -26301,7 +27004,7 @@
       </p:sp>
       <p:sp>
         <p:nvSpPr>
-          <p:cNvPr id="77" name="Rounded Rectangle 76"/>
+          <p:cNvPr id="80" name="Rounded Rectangle 79"/>
           <p:cNvSpPr/>
           <p:nvPr/>
         </p:nvSpPr>
@@ -26316,7 +27019,7 @@
             </a:avLst>
           </a:prstGeom>
           <a:solidFill>
-            <a:srgbClr val="231C18"/>
+            <a:srgbClr val="18120E"/>
           </a:solidFill>
           <a:ln>
             <a:noFill/>
@@ -26347,14 +27050,93 @@
       </p:sp>
       <p:sp>
         <p:nvSpPr>
-          <p:cNvPr id="78" name="TextBox 77"/>
-          <p:cNvSpPr txBox="1"/>
-          <p:nvPr/>
-        </p:nvSpPr>
-        <p:spPr>
-          <a:xfrm>
-            <a:off x="704088" y="6309360"/>
-            <a:ext cx="9902952" cy="384048"/>
+          <p:cNvPr id="81" name="Isosceles Triangle 80"/>
+          <p:cNvSpPr/>
+          <p:nvPr/>
+        </p:nvSpPr>
+        <p:spPr>
+          <a:xfrm>
+            <a:off x="685800" y="6364224"/>
+            <a:ext cx="237744" cy="213969"/>
+          </a:xfrm>
+          <a:prstGeom prst="triangle">
+            <a:avLst/>
+          </a:prstGeom>
+          <a:solidFill>
+            <a:srgbClr val="C9A15A"/>
+          </a:solidFill>
+          <a:ln>
+            <a:noFill/>
+          </a:ln>
+          <a:effectLst/>
+        </p:spPr>
+        <p:style>
+          <a:lnRef idx="1">
+            <a:schemeClr val="accent1"/>
+          </a:lnRef>
+          <a:fillRef idx="3">
+            <a:schemeClr val="accent1"/>
+          </a:fillRef>
+          <a:effectRef idx="2">
+            <a:schemeClr val="accent1"/>
+          </a:effectRef>
+          <a:fontRef idx="minor">
+            <a:schemeClr val="lt1"/>
+          </a:fontRef>
+        </p:style>
+        <p:txBody>
+          <a:bodyPr rtlCol="0" anchor="ctr"/>
+          <a:lstStyle/>
+          <a:p>
+            <a:pPr algn="ctr"/>
+          </a:p>
+        </p:txBody>
+      </p:sp>
+      <p:sp>
+        <p:nvSpPr>
+          <p:cNvPr id="82" name="TextBox 81"/>
+          <p:cNvSpPr txBox="1"/>
+          <p:nvPr/>
+        </p:nvSpPr>
+        <p:spPr>
+          <a:xfrm>
+            <a:off x="685800" y="6407017"/>
+            <a:ext cx="237744" cy="142646"/>
+          </a:xfrm>
+          <a:prstGeom prst="rect">
+            <a:avLst/>
+          </a:prstGeom>
+          <a:noFill/>
+        </p:spPr>
+        <p:txBody>
+          <a:bodyPr wrap="square" lIns="0" rIns="0" tIns="0" bIns="0" anchor="ctr">
+            <a:spAutoFit/>
+          </a:bodyPr>
+          <a:lstStyle/>
+          <a:p>
+            <a:pPr algn="ctr"/>
+            <a:r>
+              <a:rPr sz="1100" b="1">
+                <a:solidFill>
+                  <a:srgbClr val="18120E"/>
+                </a:solidFill>
+                <a:latin typeface="Calibri"/>
+              </a:rPr>
+              <a:t>!</a:t>
+            </a:r>
+          </a:p>
+        </p:txBody>
+      </p:sp>
+      <p:sp>
+        <p:nvSpPr>
+          <p:cNvPr id="83" name="TextBox 82"/>
+          <p:cNvSpPr txBox="1"/>
+          <p:nvPr/>
+        </p:nvSpPr>
+        <p:spPr>
+          <a:xfrm>
+            <a:off x="1069848" y="6309360"/>
+            <a:ext cx="9427464" cy="384048"/>
           </a:xfrm>
           <a:prstGeom prst="rect">
             <a:avLst/>
@@ -26379,14 +27161,14 @@
                 </a:solidFill>
                 <a:latin typeface="Calibri"/>
               </a:rPr>
-              <a:t>⚠ Розрахунок побудований лише для збірного вантажу 17 м³ — на відміну від 4-рівневого порівняння в профілі ZEK. Для зіставлення постачальників за обсягом контейнера потрібно домоделювати сценарії 40′ / 20′ / 34 м³.</a:t>
-            </a:r>
-          </a:p>
-        </p:txBody>
-      </p:sp>
-      <p:sp>
-        <p:nvSpPr>
-          <p:cNvPr id="79" name="TextBox 78"/>
+              <a:t>Розрахунок побудований лише для збірного вантажу 17 м³ — на відміну від 4-рівневого порівняння в профілі ZEK. Для зіставлення постачальників за обсягом контейнера потрібно домоделювати сценарії 40′ / 20′ / 34 м³.</a:t>
+            </a:r>
+          </a:p>
+        </p:txBody>
+      </p:sp>
+      <p:sp>
+        <p:nvSpPr>
+          <p:cNvPr id="84" name="TextBox 83"/>
           <p:cNvSpPr txBox="1"/>
           <p:nvPr/>
         </p:nvSpPr>
